--- a/S02/python-S03.pptx
+++ b/S02/python-S03.pptx
@@ -5,7 +5,7 @@
     <p:sldMasterId id="2147483672" r:id="rId1"/>
   </p:sldMasterIdLst>
   <p:notesMasterIdLst>
-    <p:notesMasterId r:id="rId12"/>
+    <p:notesMasterId r:id="rId23"/>
   </p:notesMasterIdLst>
   <p:sldIdLst>
     <p:sldId id="258" r:id="rId2"/>
@@ -17,7 +17,18 @@
     <p:sldId id="323" r:id="rId8"/>
     <p:sldId id="324" r:id="rId9"/>
     <p:sldId id="325" r:id="rId10"/>
-    <p:sldId id="266" r:id="rId11"/>
+    <p:sldId id="330" r:id="rId11"/>
+    <p:sldId id="331" r:id="rId12"/>
+    <p:sldId id="332" r:id="rId13"/>
+    <p:sldId id="326" r:id="rId14"/>
+    <p:sldId id="327" r:id="rId15"/>
+    <p:sldId id="328" r:id="rId16"/>
+    <p:sldId id="329" r:id="rId17"/>
+    <p:sldId id="333" r:id="rId18"/>
+    <p:sldId id="334" r:id="rId19"/>
+    <p:sldId id="335" r:id="rId20"/>
+    <p:sldId id="336" r:id="rId21"/>
+    <p:sldId id="266" r:id="rId22"/>
   </p:sldIdLst>
   <p:sldSz cx="12192000" cy="6858000"/>
   <p:notesSz cx="6858000" cy="9144000"/>
@@ -206,7 +217,7 @@
           <a:p>
             <a:fld id="{02EF974B-A7E7-4F83-B48F-3417BE9A34E5}" type="datetimeFigureOut">
               <a:rPr lang="en-US" smtClean="0"/>
-              <a:t>11/11/2025</a:t>
+              <a:t>11/18/2025</a:t>
             </a:fld>
             <a:endParaRPr lang="en-US"/>
           </a:p>
@@ -665,6 +676,306 @@
 </p:notes>
 </file>
 
+<file path=ppt/notesSlides/notesSlide3.xml><?xml version="1.0" encoding="utf-8"?>
+<p:notes xmlns:a="http://schemas.openxmlformats.org/drawingml/2006/main" xmlns:r="http://schemas.openxmlformats.org/officeDocument/2006/relationships" xmlns:p="http://schemas.openxmlformats.org/presentationml/2006/main">
+  <p:cSld>
+    <p:spTree>
+      <p:nvGrpSpPr>
+        <p:cNvPr id="1" name="">
+          <a:extLst>
+            <a:ext uri="{FF2B5EF4-FFF2-40B4-BE49-F238E27FC236}">
+              <a16:creationId xmlns:a16="http://schemas.microsoft.com/office/drawing/2014/main" id="{4A7DD096-F06C-D73E-D076-4A4C787D374A}"/>
+            </a:ext>
+          </a:extLst>
+        </p:cNvPr>
+        <p:cNvGrpSpPr/>
+        <p:nvPr/>
+      </p:nvGrpSpPr>
+      <p:grpSpPr>
+        <a:xfrm>
+          <a:off x="0" y="0"/>
+          <a:ext cx="0" cy="0"/>
+          <a:chOff x="0" y="0"/>
+          <a:chExt cx="0" cy="0"/>
+        </a:xfrm>
+      </p:grpSpPr>
+      <p:sp>
+        <p:nvSpPr>
+          <p:cNvPr id="2" name="Slide Image Placeholder 1">
+            <a:extLst>
+              <a:ext uri="{FF2B5EF4-FFF2-40B4-BE49-F238E27FC236}">
+                <a16:creationId xmlns:a16="http://schemas.microsoft.com/office/drawing/2014/main" id="{01F801DA-FE89-E56C-0273-4CEDDA5A5702}"/>
+              </a:ext>
+            </a:extLst>
+          </p:cNvPr>
+          <p:cNvSpPr>
+            <a:spLocks noGrp="1" noRot="1" noChangeAspect="1"/>
+          </p:cNvSpPr>
+          <p:nvPr>
+            <p:ph type="sldImg"/>
+          </p:nvPr>
+        </p:nvSpPr>
+        <p:spPr/>
+      </p:sp>
+      <p:sp>
+        <p:nvSpPr>
+          <p:cNvPr id="3" name="Notes Placeholder 2">
+            <a:extLst>
+              <a:ext uri="{FF2B5EF4-FFF2-40B4-BE49-F238E27FC236}">
+                <a16:creationId xmlns:a16="http://schemas.microsoft.com/office/drawing/2014/main" id="{2B93765F-1E56-1D68-14D8-2E1CE989D321}"/>
+              </a:ext>
+            </a:extLst>
+          </p:cNvPr>
+          <p:cNvSpPr>
+            <a:spLocks noGrp="1"/>
+          </p:cNvSpPr>
+          <p:nvPr>
+            <p:ph type="body" idx="1"/>
+          </p:nvPr>
+        </p:nvSpPr>
+        <p:spPr/>
+        <p:txBody>
+          <a:bodyPr/>
+          <a:lstStyle/>
+          <a:p>
+            <a:endParaRPr lang="en-US" dirty="0"/>
+          </a:p>
+        </p:txBody>
+      </p:sp>
+      <p:sp>
+        <p:nvSpPr>
+          <p:cNvPr id="4" name="Slide Number Placeholder 3">
+            <a:extLst>
+              <a:ext uri="{FF2B5EF4-FFF2-40B4-BE49-F238E27FC236}">
+                <a16:creationId xmlns:a16="http://schemas.microsoft.com/office/drawing/2014/main" id="{C2BFF4E1-91CF-EEDE-C039-4BE0B21D3CC7}"/>
+              </a:ext>
+            </a:extLst>
+          </p:cNvPr>
+          <p:cNvSpPr>
+            <a:spLocks noGrp="1"/>
+          </p:cNvSpPr>
+          <p:nvPr>
+            <p:ph type="sldNum" sz="quarter" idx="5"/>
+          </p:nvPr>
+        </p:nvSpPr>
+        <p:spPr/>
+        <p:txBody>
+          <a:bodyPr/>
+          <a:lstStyle/>
+          <a:p>
+            <a:fld id="{7CC752D2-36E0-440B-8BEC-3F2C8D7482B5}" type="slidenum">
+              <a:rPr lang="en-US" smtClean="0"/>
+              <a:t>13</a:t>
+            </a:fld>
+            <a:endParaRPr lang="en-US"/>
+          </a:p>
+        </p:txBody>
+      </p:sp>
+    </p:spTree>
+    <p:extLst>
+      <p:ext uri="{BB962C8B-B14F-4D97-AF65-F5344CB8AC3E}">
+        <p14:creationId xmlns:p14="http://schemas.microsoft.com/office/powerpoint/2010/main" val="1961845003"/>
+      </p:ext>
+    </p:extLst>
+  </p:cSld>
+  <p:clrMapOvr>
+    <a:masterClrMapping/>
+  </p:clrMapOvr>
+</p:notes>
+</file>
+
+<file path=ppt/notesSlides/notesSlide4.xml><?xml version="1.0" encoding="utf-8"?>
+<p:notes xmlns:a="http://schemas.openxmlformats.org/drawingml/2006/main" xmlns:r="http://schemas.openxmlformats.org/officeDocument/2006/relationships" xmlns:p="http://schemas.openxmlformats.org/presentationml/2006/main">
+  <p:cSld>
+    <p:spTree>
+      <p:nvGrpSpPr>
+        <p:cNvPr id="1" name=""/>
+        <p:cNvGrpSpPr/>
+        <p:nvPr/>
+      </p:nvGrpSpPr>
+      <p:grpSpPr>
+        <a:xfrm>
+          <a:off x="0" y="0"/>
+          <a:ext cx="0" cy="0"/>
+          <a:chOff x="0" y="0"/>
+          <a:chExt cx="0" cy="0"/>
+        </a:xfrm>
+      </p:grpSpPr>
+      <p:sp>
+        <p:nvSpPr>
+          <p:cNvPr id="2" name="Slide Image Placeholder 1"/>
+          <p:cNvSpPr>
+            <a:spLocks noGrp="1" noRot="1" noChangeAspect="1"/>
+          </p:cNvSpPr>
+          <p:nvPr>
+            <p:ph type="sldImg"/>
+          </p:nvPr>
+        </p:nvSpPr>
+        <p:spPr/>
+      </p:sp>
+      <p:sp>
+        <p:nvSpPr>
+          <p:cNvPr id="3" name="Notes Placeholder 2"/>
+          <p:cNvSpPr>
+            <a:spLocks noGrp="1"/>
+          </p:cNvSpPr>
+          <p:nvPr>
+            <p:ph type="body" idx="1"/>
+          </p:nvPr>
+        </p:nvSpPr>
+        <p:spPr/>
+        <p:txBody>
+          <a:bodyPr/>
+          <a:lstStyle/>
+          <a:p>
+            <a:endParaRPr lang="en-US" dirty="0"/>
+          </a:p>
+        </p:txBody>
+      </p:sp>
+      <p:sp>
+        <p:nvSpPr>
+          <p:cNvPr id="4" name="Slide Number Placeholder 3"/>
+          <p:cNvSpPr>
+            <a:spLocks noGrp="1"/>
+          </p:cNvSpPr>
+          <p:nvPr>
+            <p:ph type="sldNum" sz="quarter" idx="5"/>
+          </p:nvPr>
+        </p:nvSpPr>
+        <p:spPr/>
+        <p:txBody>
+          <a:bodyPr/>
+          <a:lstStyle/>
+          <a:p>
+            <a:fld id="{7CC752D2-36E0-440B-8BEC-3F2C8D7482B5}" type="slidenum">
+              <a:rPr lang="en-US" smtClean="0"/>
+              <a:t>14</a:t>
+            </a:fld>
+            <a:endParaRPr lang="en-US"/>
+          </a:p>
+        </p:txBody>
+      </p:sp>
+    </p:spTree>
+    <p:extLst>
+      <p:ext uri="{BB962C8B-B14F-4D97-AF65-F5344CB8AC3E}">
+        <p14:creationId xmlns:p14="http://schemas.microsoft.com/office/powerpoint/2010/main" val="399406144"/>
+      </p:ext>
+    </p:extLst>
+  </p:cSld>
+  <p:clrMapOvr>
+    <a:masterClrMapping/>
+  </p:clrMapOvr>
+</p:notes>
+</file>
+
+<file path=ppt/notesSlides/notesSlide5.xml><?xml version="1.0" encoding="utf-8"?>
+<p:notes xmlns:a="http://schemas.openxmlformats.org/drawingml/2006/main" xmlns:r="http://schemas.openxmlformats.org/officeDocument/2006/relationships" xmlns:p="http://schemas.openxmlformats.org/presentationml/2006/main">
+  <p:cSld>
+    <p:spTree>
+      <p:nvGrpSpPr>
+        <p:cNvPr id="1" name="">
+          <a:extLst>
+            <a:ext uri="{FF2B5EF4-FFF2-40B4-BE49-F238E27FC236}">
+              <a16:creationId xmlns:a16="http://schemas.microsoft.com/office/drawing/2014/main" id="{90FA24E1-CE5D-D313-6970-68BF603C2EEC}"/>
+            </a:ext>
+          </a:extLst>
+        </p:cNvPr>
+        <p:cNvGrpSpPr/>
+        <p:nvPr/>
+      </p:nvGrpSpPr>
+      <p:grpSpPr>
+        <a:xfrm>
+          <a:off x="0" y="0"/>
+          <a:ext cx="0" cy="0"/>
+          <a:chOff x="0" y="0"/>
+          <a:chExt cx="0" cy="0"/>
+        </a:xfrm>
+      </p:grpSpPr>
+      <p:sp>
+        <p:nvSpPr>
+          <p:cNvPr id="2" name="Slide Image Placeholder 1">
+            <a:extLst>
+              <a:ext uri="{FF2B5EF4-FFF2-40B4-BE49-F238E27FC236}">
+                <a16:creationId xmlns:a16="http://schemas.microsoft.com/office/drawing/2014/main" id="{BF6BDE29-0B8A-3BC5-7BF5-8D370C0F6E20}"/>
+              </a:ext>
+            </a:extLst>
+          </p:cNvPr>
+          <p:cNvSpPr>
+            <a:spLocks noGrp="1" noRot="1" noChangeAspect="1"/>
+          </p:cNvSpPr>
+          <p:nvPr>
+            <p:ph type="sldImg"/>
+          </p:nvPr>
+        </p:nvSpPr>
+        <p:spPr/>
+      </p:sp>
+      <p:sp>
+        <p:nvSpPr>
+          <p:cNvPr id="3" name="Notes Placeholder 2">
+            <a:extLst>
+              <a:ext uri="{FF2B5EF4-FFF2-40B4-BE49-F238E27FC236}">
+                <a16:creationId xmlns:a16="http://schemas.microsoft.com/office/drawing/2014/main" id="{95B31CD2-6B94-4788-353A-F37AAF5DB230}"/>
+              </a:ext>
+            </a:extLst>
+          </p:cNvPr>
+          <p:cNvSpPr>
+            <a:spLocks noGrp="1"/>
+          </p:cNvSpPr>
+          <p:nvPr>
+            <p:ph type="body" idx="1"/>
+          </p:nvPr>
+        </p:nvSpPr>
+        <p:spPr/>
+        <p:txBody>
+          <a:bodyPr/>
+          <a:lstStyle/>
+          <a:p>
+            <a:endParaRPr lang="en-US" dirty="0"/>
+          </a:p>
+        </p:txBody>
+      </p:sp>
+      <p:sp>
+        <p:nvSpPr>
+          <p:cNvPr id="4" name="Slide Number Placeholder 3">
+            <a:extLst>
+              <a:ext uri="{FF2B5EF4-FFF2-40B4-BE49-F238E27FC236}">
+                <a16:creationId xmlns:a16="http://schemas.microsoft.com/office/drawing/2014/main" id="{6355A0A2-87BE-9BDF-7D2A-B98D876E0B2D}"/>
+              </a:ext>
+            </a:extLst>
+          </p:cNvPr>
+          <p:cNvSpPr>
+            <a:spLocks noGrp="1"/>
+          </p:cNvSpPr>
+          <p:nvPr>
+            <p:ph type="sldNum" sz="quarter" idx="5"/>
+          </p:nvPr>
+        </p:nvSpPr>
+        <p:spPr/>
+        <p:txBody>
+          <a:bodyPr/>
+          <a:lstStyle/>
+          <a:p>
+            <a:fld id="{7CC752D2-36E0-440B-8BEC-3F2C8D7482B5}" type="slidenum">
+              <a:rPr lang="en-US" smtClean="0"/>
+              <a:t>15</a:t>
+            </a:fld>
+            <a:endParaRPr lang="en-US"/>
+          </a:p>
+        </p:txBody>
+      </p:sp>
+    </p:spTree>
+    <p:extLst>
+      <p:ext uri="{BB962C8B-B14F-4D97-AF65-F5344CB8AC3E}">
+        <p14:creationId xmlns:p14="http://schemas.microsoft.com/office/powerpoint/2010/main" val="3073803406"/>
+      </p:ext>
+    </p:extLst>
+  </p:cSld>
+  <p:clrMapOvr>
+    <a:masterClrMapping/>
+  </p:clrMapOvr>
+</p:notes>
+</file>
+
 <file path=ppt/slideLayouts/slideLayout1.xml><?xml version="1.0" encoding="utf-8"?>
 <p:sldLayout xmlns:a="http://schemas.openxmlformats.org/drawingml/2006/main" xmlns:r="http://schemas.openxmlformats.org/officeDocument/2006/relationships" xmlns:p="http://schemas.openxmlformats.org/presentationml/2006/main" type="title" preserve="1">
   <p:cSld name="Title Slide">
@@ -850,7 +1161,7 @@
           <a:p>
             <a:fld id="{1B47A3A2-ECA8-4476-8799-B477369250BE}" type="datetimeFigureOut">
               <a:rPr lang="en-US" smtClean="0"/>
-              <a:t>11/11/2025</a:t>
+              <a:t>11/18/2025</a:t>
             </a:fld>
             <a:endParaRPr lang="en-US"/>
           </a:p>
@@ -1148,7 +1459,7 @@
           <a:p>
             <a:fld id="{1B47A3A2-ECA8-4476-8799-B477369250BE}" type="datetimeFigureOut">
               <a:rPr lang="en-US" smtClean="0"/>
-              <a:t>11/11/2025</a:t>
+              <a:t>11/18/2025</a:t>
             </a:fld>
             <a:endParaRPr lang="en-US"/>
           </a:p>
@@ -1340,7 +1651,7 @@
           <a:p>
             <a:fld id="{1B47A3A2-ECA8-4476-8799-B477369250BE}" type="datetimeFigureOut">
               <a:rPr lang="en-US" smtClean="0"/>
-              <a:t>11/11/2025</a:t>
+              <a:t>11/18/2025</a:t>
             </a:fld>
             <a:endParaRPr lang="en-US"/>
           </a:p>
@@ -1601,7 +1912,7 @@
           <a:p>
             <a:fld id="{1B47A3A2-ECA8-4476-8799-B477369250BE}" type="datetimeFigureOut">
               <a:rPr lang="en-US" smtClean="0"/>
-              <a:t>11/11/2025</a:t>
+              <a:t>11/18/2025</a:t>
             </a:fld>
             <a:endParaRPr lang="en-US"/>
           </a:p>
@@ -2025,7 +2336,7 @@
           <a:p>
             <a:fld id="{1B47A3A2-ECA8-4476-8799-B477369250BE}" type="datetimeFigureOut">
               <a:rPr lang="en-US" smtClean="0"/>
-              <a:t>11/11/2025</a:t>
+              <a:t>11/18/2025</a:t>
             </a:fld>
             <a:endParaRPr lang="en-US"/>
           </a:p>
@@ -2562,7 +2873,7 @@
           <a:p>
             <a:fld id="{1B47A3A2-ECA8-4476-8799-B477369250BE}" type="datetimeFigureOut">
               <a:rPr lang="en-US" smtClean="0"/>
-              <a:t>11/11/2025</a:t>
+              <a:t>11/18/2025</a:t>
             </a:fld>
             <a:endParaRPr lang="en-US"/>
           </a:p>
@@ -3426,7 +3737,7 @@
           <a:p>
             <a:fld id="{1B47A3A2-ECA8-4476-8799-B477369250BE}" type="datetimeFigureOut">
               <a:rPr lang="en-US" smtClean="0"/>
-              <a:t>11/11/2025</a:t>
+              <a:t>11/18/2025</a:t>
             </a:fld>
             <a:endParaRPr lang="en-US"/>
           </a:p>
@@ -3596,7 +3907,7 @@
           <a:p>
             <a:fld id="{1B47A3A2-ECA8-4476-8799-B477369250BE}" type="datetimeFigureOut">
               <a:rPr lang="en-US" smtClean="0"/>
-              <a:t>11/11/2025</a:t>
+              <a:t>11/18/2025</a:t>
             </a:fld>
             <a:endParaRPr lang="en-US"/>
           </a:p>
@@ -3780,7 +4091,7 @@
           <a:p>
             <a:fld id="{1B47A3A2-ECA8-4476-8799-B477369250BE}" type="datetimeFigureOut">
               <a:rPr lang="en-US" smtClean="0"/>
-              <a:t>11/11/2025</a:t>
+              <a:t>11/18/2025</a:t>
             </a:fld>
             <a:endParaRPr lang="en-US"/>
           </a:p>
@@ -3950,7 +4261,7 @@
           <a:p>
             <a:fld id="{1B47A3A2-ECA8-4476-8799-B477369250BE}" type="datetimeFigureOut">
               <a:rPr lang="en-US" smtClean="0"/>
-              <a:t>11/11/2025</a:t>
+              <a:t>11/18/2025</a:t>
             </a:fld>
             <a:endParaRPr lang="en-US"/>
           </a:p>
@@ -4194,7 +4505,7 @@
           <a:p>
             <a:fld id="{1B47A3A2-ECA8-4476-8799-B477369250BE}" type="datetimeFigureOut">
               <a:rPr lang="en-US" smtClean="0"/>
-              <a:t>11/11/2025</a:t>
+              <a:t>11/18/2025</a:t>
             </a:fld>
             <a:endParaRPr lang="en-US"/>
           </a:p>
@@ -4430,7 +4741,7 @@
           <a:p>
             <a:fld id="{1B47A3A2-ECA8-4476-8799-B477369250BE}" type="datetimeFigureOut">
               <a:rPr lang="en-US" smtClean="0"/>
-              <a:t>11/11/2025</a:t>
+              <a:t>11/18/2025</a:t>
             </a:fld>
             <a:endParaRPr lang="en-US"/>
           </a:p>
@@ -4896,7 +5207,7 @@
           <a:p>
             <a:fld id="{1B47A3A2-ECA8-4476-8799-B477369250BE}" type="datetimeFigureOut">
               <a:rPr lang="en-US" smtClean="0"/>
-              <a:t>11/11/2025</a:t>
+              <a:t>11/18/2025</a:t>
             </a:fld>
             <a:endParaRPr lang="en-US"/>
           </a:p>
@@ -5014,7 +5325,7 @@
           <a:p>
             <a:fld id="{1B47A3A2-ECA8-4476-8799-B477369250BE}" type="datetimeFigureOut">
               <a:rPr lang="en-US" smtClean="0"/>
-              <a:t>11/11/2025</a:t>
+              <a:t>11/18/2025</a:t>
             </a:fld>
             <a:endParaRPr lang="en-US"/>
           </a:p>
@@ -5109,7 +5420,7 @@
           <a:p>
             <a:fld id="{1B47A3A2-ECA8-4476-8799-B477369250BE}" type="datetimeFigureOut">
               <a:rPr lang="en-US" smtClean="0"/>
-              <a:t>11/11/2025</a:t>
+              <a:t>11/18/2025</a:t>
             </a:fld>
             <a:endParaRPr lang="en-US"/>
           </a:p>
@@ -5364,7 +5675,7 @@
           <a:p>
             <a:fld id="{1B47A3A2-ECA8-4476-8799-B477369250BE}" type="datetimeFigureOut">
               <a:rPr lang="en-US" smtClean="0"/>
-              <a:t>11/11/2025</a:t>
+              <a:t>11/18/2025</a:t>
             </a:fld>
             <a:endParaRPr lang="en-US"/>
           </a:p>
@@ -5664,7 +5975,7 @@
           <a:p>
             <a:fld id="{1B47A3A2-ECA8-4476-8799-B477369250BE}" type="datetimeFigureOut">
               <a:rPr lang="en-US" smtClean="0"/>
-              <a:t>11/11/2025</a:t>
+              <a:t>11/18/2025</a:t>
             </a:fld>
             <a:endParaRPr lang="en-US"/>
           </a:p>
@@ -5898,7 +6209,7 @@
           <a:p>
             <a:fld id="{1B47A3A2-ECA8-4476-8799-B477369250BE}" type="datetimeFigureOut">
               <a:rPr lang="en-US" smtClean="0"/>
-              <a:t>11/11/2025</a:t>
+              <a:t>11/18/2025</a:t>
             </a:fld>
             <a:endParaRPr lang="en-US"/>
           </a:p>
@@ -6814,7 +7125,7 @@
         <p:cNvPr id="1" name="">
           <a:extLst>
             <a:ext uri="{FF2B5EF4-FFF2-40B4-BE49-F238E27FC236}">
-              <a16:creationId xmlns:a16="http://schemas.microsoft.com/office/drawing/2014/main" id="{ABFFAF5D-C38F-AC7F-348F-2D29331472D5}"/>
+              <a16:creationId xmlns:a16="http://schemas.microsoft.com/office/drawing/2014/main" id="{CC22F7C1-919D-D93E-A8CC-947DC3682D9E}"/>
             </a:ext>
           </a:extLst>
         </p:cNvPr>
@@ -6834,7 +7145,7 @@
           <p:cNvPr id="2" name="Title 1">
             <a:extLst>
               <a:ext uri="{FF2B5EF4-FFF2-40B4-BE49-F238E27FC236}">
-                <a16:creationId xmlns:a16="http://schemas.microsoft.com/office/drawing/2014/main" id="{28199336-2112-9982-9D57-07EE783F2A9E}"/>
+                <a16:creationId xmlns:a16="http://schemas.microsoft.com/office/drawing/2014/main" id="{67E1217C-3BDC-47D8-3D72-7228E00C79D4}"/>
               </a:ext>
             </a:extLst>
           </p:cNvPr>
@@ -6842,15 +7153,10 @@
             <a:spLocks noGrp="1"/>
           </p:cNvSpPr>
           <p:nvPr>
-            <p:ph type="ctrTitle"/>
-          </p:nvPr>
-        </p:nvSpPr>
-        <p:spPr>
-          <a:xfrm>
-            <a:off x="1370693" y="2240764"/>
-            <a:ext cx="9440034" cy="2407442"/>
-          </a:xfrm>
-        </p:spPr>
+            <p:ph type="title"/>
+          </p:nvPr>
+        </p:nvSpPr>
+        <p:spPr/>
         <p:txBody>
           <a:bodyPr>
             <a:normAutofit/>
@@ -6859,13 +7165,436 @@
           <a:p>
             <a:pPr rtl="1"/>
             <a:r>
-              <a:rPr lang="fa-IR" sz="8000" b="1" dirty="0">
+              <a:rPr lang="fa-IR" b="1" dirty="0">
+                <a:effectLst>
+                  <a:outerShdw blurRad="38100" dist="38100" dir="2700000" algn="tl">
+                    <a:srgbClr val="000000">
+                      <a:alpha val="43137"/>
+                    </a:srgbClr>
+                  </a:outerShdw>
+                </a:effectLst>
                 <a:latin typeface="IRANSans" panose="02040503050201020203" pitchFamily="18" charset="-78"/>
                 <a:cs typeface="IRANSans" panose="02040503050201020203" pitchFamily="18" charset="-78"/>
               </a:rPr>
-              <a:t>موفق باشید</a:t>
-            </a:r>
-            <a:endParaRPr lang="en-US" sz="8000" b="1" dirty="0">
+              <a:t>و اگر.... و اگر.... و اگر.....</a:t>
+            </a:r>
+            <a:endParaRPr lang="en-US" b="1" dirty="0">
+              <a:effectLst>
+                <a:outerShdw blurRad="38100" dist="38100" dir="2700000" algn="tl">
+                  <a:srgbClr val="000000">
+                    <a:alpha val="43137"/>
+                  </a:srgbClr>
+                </a:outerShdw>
+              </a:effectLst>
+              <a:latin typeface="IRANSans" panose="02040503050201020203" pitchFamily="18" charset="-78"/>
+              <a:cs typeface="IRANSans" panose="02040503050201020203" pitchFamily="18" charset="-78"/>
+            </a:endParaRPr>
+          </a:p>
+        </p:txBody>
+      </p:sp>
+      <p:pic>
+        <p:nvPicPr>
+          <p:cNvPr id="5" name="Content Placeholder 4">
+            <a:extLst>
+              <a:ext uri="{FF2B5EF4-FFF2-40B4-BE49-F238E27FC236}">
+                <a16:creationId xmlns:a16="http://schemas.microsoft.com/office/drawing/2014/main" id="{34B68E12-EAB2-AC44-08B7-9F092700B404}"/>
+              </a:ext>
+            </a:extLst>
+          </p:cNvPr>
+          <p:cNvPicPr>
+            <a:picLocks noGrp="1" noChangeAspect="1"/>
+          </p:cNvPicPr>
+          <p:nvPr>
+            <p:ph idx="1"/>
+          </p:nvPr>
+        </p:nvPicPr>
+        <p:blipFill>
+          <a:blip r:embed="rId2"/>
+          <a:stretch>
+            <a:fillRect/>
+          </a:stretch>
+        </p:blipFill>
+        <p:spPr>
+          <a:xfrm>
+            <a:off x="913795" y="1580050"/>
+            <a:ext cx="4970902" cy="5076322"/>
+          </a:xfrm>
+          <a:prstGeom prst="rect">
+            <a:avLst/>
+          </a:prstGeom>
+          <a:effectLst>
+            <a:outerShdw blurRad="25400" dir="17880000">
+              <a:srgbClr val="000000">
+                <a:alpha val="46000"/>
+              </a:srgbClr>
+            </a:outerShdw>
+          </a:effectLst>
+        </p:spPr>
+      </p:pic>
+    </p:spTree>
+    <p:extLst>
+      <p:ext uri="{BB962C8B-B14F-4D97-AF65-F5344CB8AC3E}">
+        <p14:creationId xmlns:p14="http://schemas.microsoft.com/office/powerpoint/2010/main" val="2951469077"/>
+      </p:ext>
+    </p:extLst>
+  </p:cSld>
+  <p:clrMapOvr>
+    <a:masterClrMapping/>
+  </p:clrMapOvr>
+</p:sld>
+</file>
+
+<file path=ppt/slides/slide11.xml><?xml version="1.0" encoding="utf-8"?>
+<p:sld xmlns:a="http://schemas.openxmlformats.org/drawingml/2006/main" xmlns:r="http://schemas.openxmlformats.org/officeDocument/2006/relationships" xmlns:p="http://schemas.openxmlformats.org/presentationml/2006/main">
+  <p:cSld>
+    <p:spTree>
+      <p:nvGrpSpPr>
+        <p:cNvPr id="1" name="">
+          <a:extLst>
+            <a:ext uri="{FF2B5EF4-FFF2-40B4-BE49-F238E27FC236}">
+              <a16:creationId xmlns:a16="http://schemas.microsoft.com/office/drawing/2014/main" id="{A42741C8-4CA2-A5BC-BAF3-E8FD05ECBD84}"/>
+            </a:ext>
+          </a:extLst>
+        </p:cNvPr>
+        <p:cNvGrpSpPr/>
+        <p:nvPr/>
+      </p:nvGrpSpPr>
+      <p:grpSpPr>
+        <a:xfrm>
+          <a:off x="0" y="0"/>
+          <a:ext cx="0" cy="0"/>
+          <a:chOff x="0" y="0"/>
+          <a:chExt cx="0" cy="0"/>
+        </a:xfrm>
+      </p:grpSpPr>
+      <p:sp>
+        <p:nvSpPr>
+          <p:cNvPr id="2" name="Title 1">
+            <a:extLst>
+              <a:ext uri="{FF2B5EF4-FFF2-40B4-BE49-F238E27FC236}">
+                <a16:creationId xmlns:a16="http://schemas.microsoft.com/office/drawing/2014/main" id="{810BD1ED-A566-35D0-B20F-BFA516387BB8}"/>
+              </a:ext>
+            </a:extLst>
+          </p:cNvPr>
+          <p:cNvSpPr>
+            <a:spLocks noGrp="1"/>
+          </p:cNvSpPr>
+          <p:nvPr>
+            <p:ph type="title"/>
+          </p:nvPr>
+        </p:nvSpPr>
+        <p:spPr/>
+        <p:txBody>
+          <a:bodyPr>
+            <a:normAutofit/>
+          </a:bodyPr>
+          <a:lstStyle/>
+          <a:p>
+            <a:pPr rtl="1"/>
+            <a:r>
+              <a:rPr lang="en-US" b="1" dirty="0">
+                <a:effectLst>
+                  <a:outerShdw blurRad="38100" dist="38100" dir="2700000" algn="tl">
+                    <a:srgbClr val="000000">
+                      <a:alpha val="43137"/>
+                    </a:srgbClr>
+                  </a:outerShdw>
+                </a:effectLst>
+                <a:latin typeface="IRANSans" panose="02040503050201020203" pitchFamily="18" charset="-78"/>
+                <a:cs typeface="IRANSans" panose="02040503050201020203" pitchFamily="18" charset="-78"/>
+              </a:rPr>
+              <a:t>and </a:t>
+            </a:r>
+            <a:r>
+              <a:rPr lang="fa-IR" b="1" dirty="0">
+                <a:effectLst>
+                  <a:outerShdw blurRad="38100" dist="38100" dir="2700000" algn="tl">
+                    <a:srgbClr val="000000">
+                      <a:alpha val="43137"/>
+                    </a:srgbClr>
+                  </a:outerShdw>
+                </a:effectLst>
+                <a:latin typeface="IRANSans" panose="02040503050201020203" pitchFamily="18" charset="-78"/>
+                <a:cs typeface="IRANSans" panose="02040503050201020203" pitchFamily="18" charset="-78"/>
+              </a:rPr>
+              <a:t> و </a:t>
+            </a:r>
+            <a:r>
+              <a:rPr lang="en-US" b="1" dirty="0">
+                <a:effectLst>
+                  <a:outerShdw blurRad="38100" dist="38100" dir="2700000" algn="tl">
+                    <a:srgbClr val="000000">
+                      <a:alpha val="43137"/>
+                    </a:srgbClr>
+                  </a:outerShdw>
+                </a:effectLst>
+                <a:latin typeface="IRANSans" panose="02040503050201020203" pitchFamily="18" charset="-78"/>
+                <a:cs typeface="IRANSans" panose="02040503050201020203" pitchFamily="18" charset="-78"/>
+              </a:rPr>
+              <a:t>or</a:t>
+            </a:r>
+          </a:p>
+        </p:txBody>
+      </p:sp>
+      <p:pic>
+        <p:nvPicPr>
+          <p:cNvPr id="7" name="Content Placeholder 6">
+            <a:extLst>
+              <a:ext uri="{FF2B5EF4-FFF2-40B4-BE49-F238E27FC236}">
+                <a16:creationId xmlns:a16="http://schemas.microsoft.com/office/drawing/2014/main" id="{2391D7AA-7F73-6E90-522C-A879C0764FFB}"/>
+              </a:ext>
+            </a:extLst>
+          </p:cNvPr>
+          <p:cNvPicPr>
+            <a:picLocks noGrp="1" noChangeAspect="1"/>
+          </p:cNvPicPr>
+          <p:nvPr>
+            <p:ph idx="1"/>
+          </p:nvPr>
+        </p:nvPicPr>
+        <p:blipFill>
+          <a:blip r:embed="rId2"/>
+          <a:stretch>
+            <a:fillRect/>
+          </a:stretch>
+        </p:blipFill>
+        <p:spPr>
+          <a:xfrm>
+            <a:off x="667007" y="1876312"/>
+            <a:ext cx="10847338" cy="4118346"/>
+          </a:xfrm>
+          <a:prstGeom prst="rect">
+            <a:avLst/>
+          </a:prstGeom>
+          <a:effectLst>
+            <a:outerShdw blurRad="25400" dir="17880000">
+              <a:srgbClr val="000000">
+                <a:alpha val="46000"/>
+              </a:srgbClr>
+            </a:outerShdw>
+          </a:effectLst>
+        </p:spPr>
+      </p:pic>
+    </p:spTree>
+    <p:extLst>
+      <p:ext uri="{BB962C8B-B14F-4D97-AF65-F5344CB8AC3E}">
+        <p14:creationId xmlns:p14="http://schemas.microsoft.com/office/powerpoint/2010/main" val="960108061"/>
+      </p:ext>
+    </p:extLst>
+  </p:cSld>
+  <p:clrMapOvr>
+    <a:masterClrMapping/>
+  </p:clrMapOvr>
+</p:sld>
+</file>
+
+<file path=ppt/slides/slide12.xml><?xml version="1.0" encoding="utf-8"?>
+<p:sld xmlns:a="http://schemas.openxmlformats.org/drawingml/2006/main" xmlns:r="http://schemas.openxmlformats.org/officeDocument/2006/relationships" xmlns:p="http://schemas.openxmlformats.org/presentationml/2006/main">
+  <p:cSld>
+    <p:spTree>
+      <p:nvGrpSpPr>
+        <p:cNvPr id="1" name="">
+          <a:extLst>
+            <a:ext uri="{FF2B5EF4-FFF2-40B4-BE49-F238E27FC236}">
+              <a16:creationId xmlns:a16="http://schemas.microsoft.com/office/drawing/2014/main" id="{ACFB1B34-7888-8768-942A-5157A0C99F9A}"/>
+            </a:ext>
+          </a:extLst>
+        </p:cNvPr>
+        <p:cNvGrpSpPr/>
+        <p:nvPr/>
+      </p:nvGrpSpPr>
+      <p:grpSpPr>
+        <a:xfrm>
+          <a:off x="0" y="0"/>
+          <a:ext cx="0" cy="0"/>
+          <a:chOff x="0" y="0"/>
+          <a:chExt cx="0" cy="0"/>
+        </a:xfrm>
+      </p:grpSpPr>
+      <p:sp>
+        <p:nvSpPr>
+          <p:cNvPr id="2" name="Title 1">
+            <a:extLst>
+              <a:ext uri="{FF2B5EF4-FFF2-40B4-BE49-F238E27FC236}">
+                <a16:creationId xmlns:a16="http://schemas.microsoft.com/office/drawing/2014/main" id="{866EA69E-8F42-43C7-217B-3C62D4AB0D4C}"/>
+              </a:ext>
+            </a:extLst>
+          </p:cNvPr>
+          <p:cNvSpPr>
+            <a:spLocks noGrp="1"/>
+          </p:cNvSpPr>
+          <p:nvPr>
+            <p:ph type="title"/>
+          </p:nvPr>
+        </p:nvSpPr>
+        <p:spPr/>
+        <p:txBody>
+          <a:bodyPr>
+            <a:normAutofit/>
+          </a:bodyPr>
+          <a:lstStyle/>
+          <a:p>
+            <a:pPr rtl="1"/>
+            <a:r>
+              <a:rPr lang="en-US" b="1" dirty="0">
+                <a:effectLst>
+                  <a:outerShdw blurRad="38100" dist="38100" dir="2700000" algn="tl">
+                    <a:srgbClr val="000000">
+                      <a:alpha val="43137"/>
+                    </a:srgbClr>
+                  </a:outerShdw>
+                </a:effectLst>
+                <a:latin typeface="IRANSans" panose="02040503050201020203" pitchFamily="18" charset="-78"/>
+                <a:cs typeface="IRANSans" panose="02040503050201020203" pitchFamily="18" charset="-78"/>
+              </a:rPr>
+              <a:t>and </a:t>
+            </a:r>
+            <a:r>
+              <a:rPr lang="fa-IR" b="1" dirty="0">
+                <a:effectLst>
+                  <a:outerShdw blurRad="38100" dist="38100" dir="2700000" algn="tl">
+                    <a:srgbClr val="000000">
+                      <a:alpha val="43137"/>
+                    </a:srgbClr>
+                  </a:outerShdw>
+                </a:effectLst>
+                <a:latin typeface="IRANSans" panose="02040503050201020203" pitchFamily="18" charset="-78"/>
+                <a:cs typeface="IRANSans" panose="02040503050201020203" pitchFamily="18" charset="-78"/>
+              </a:rPr>
+              <a:t> و </a:t>
+            </a:r>
+            <a:r>
+              <a:rPr lang="en-US" b="1" dirty="0">
+                <a:effectLst>
+                  <a:outerShdw blurRad="38100" dist="38100" dir="2700000" algn="tl">
+                    <a:srgbClr val="000000">
+                      <a:alpha val="43137"/>
+                    </a:srgbClr>
+                  </a:outerShdw>
+                </a:effectLst>
+                <a:latin typeface="IRANSans" panose="02040503050201020203" pitchFamily="18" charset="-78"/>
+                <a:cs typeface="IRANSans" panose="02040503050201020203" pitchFamily="18" charset="-78"/>
+              </a:rPr>
+              <a:t>or</a:t>
+            </a:r>
+          </a:p>
+        </p:txBody>
+      </p:sp>
+      <p:pic>
+        <p:nvPicPr>
+          <p:cNvPr id="6" name="Content Placeholder 5">
+            <a:extLst>
+              <a:ext uri="{FF2B5EF4-FFF2-40B4-BE49-F238E27FC236}">
+                <a16:creationId xmlns:a16="http://schemas.microsoft.com/office/drawing/2014/main" id="{4259E4B3-BFCB-C115-7801-D59C2ADBBEED}"/>
+              </a:ext>
+            </a:extLst>
+          </p:cNvPr>
+          <p:cNvPicPr>
+            <a:picLocks noGrp="1" noChangeAspect="1"/>
+          </p:cNvPicPr>
+          <p:nvPr>
+            <p:ph idx="1"/>
+          </p:nvPr>
+        </p:nvPicPr>
+        <p:blipFill>
+          <a:blip r:embed="rId2"/>
+          <a:stretch>
+            <a:fillRect/>
+          </a:stretch>
+        </p:blipFill>
+        <p:spPr>
+          <a:xfrm>
+            <a:off x="1228550" y="1584199"/>
+            <a:ext cx="9724252" cy="5106482"/>
+          </a:xfrm>
+          <a:prstGeom prst="rect">
+            <a:avLst/>
+          </a:prstGeom>
+          <a:effectLst>
+            <a:outerShdw blurRad="25400" dir="17880000">
+              <a:srgbClr val="000000">
+                <a:alpha val="46000"/>
+              </a:srgbClr>
+            </a:outerShdw>
+          </a:effectLst>
+        </p:spPr>
+      </p:pic>
+    </p:spTree>
+    <p:extLst>
+      <p:ext uri="{BB962C8B-B14F-4D97-AF65-F5344CB8AC3E}">
+        <p14:creationId xmlns:p14="http://schemas.microsoft.com/office/powerpoint/2010/main" val="121254116"/>
+      </p:ext>
+    </p:extLst>
+  </p:cSld>
+  <p:clrMapOvr>
+    <a:masterClrMapping/>
+  </p:clrMapOvr>
+</p:sld>
+</file>
+
+<file path=ppt/slides/slide13.xml><?xml version="1.0" encoding="utf-8"?>
+<p:sld xmlns:a="http://schemas.openxmlformats.org/drawingml/2006/main" xmlns:r="http://schemas.openxmlformats.org/officeDocument/2006/relationships" xmlns:p="http://schemas.openxmlformats.org/presentationml/2006/main">
+  <p:cSld>
+    <p:spTree>
+      <p:nvGrpSpPr>
+        <p:cNvPr id="1" name="">
+          <a:extLst>
+            <a:ext uri="{FF2B5EF4-FFF2-40B4-BE49-F238E27FC236}">
+              <a16:creationId xmlns:a16="http://schemas.microsoft.com/office/drawing/2014/main" id="{34543719-25CC-948C-E7B8-9ACD4929C32C}"/>
+            </a:ext>
+          </a:extLst>
+        </p:cNvPr>
+        <p:cNvGrpSpPr/>
+        <p:nvPr/>
+      </p:nvGrpSpPr>
+      <p:grpSpPr>
+        <a:xfrm>
+          <a:off x="0" y="0"/>
+          <a:ext cx="0" cy="0"/>
+          <a:chOff x="0" y="0"/>
+          <a:chExt cx="0" cy="0"/>
+        </a:xfrm>
+      </p:grpSpPr>
+      <p:sp>
+        <p:nvSpPr>
+          <p:cNvPr id="2" name="Title 1">
+            <a:extLst>
+              <a:ext uri="{FF2B5EF4-FFF2-40B4-BE49-F238E27FC236}">
+                <a16:creationId xmlns:a16="http://schemas.microsoft.com/office/drawing/2014/main" id="{555BC443-C2FF-0A8B-03BE-2A4122F16554}"/>
+              </a:ext>
+            </a:extLst>
+          </p:cNvPr>
+          <p:cNvSpPr>
+            <a:spLocks noGrp="1"/>
+          </p:cNvSpPr>
+          <p:nvPr>
+            <p:ph type="ctrTitle"/>
+          </p:nvPr>
+        </p:nvSpPr>
+        <p:spPr>
+          <a:xfrm>
+            <a:off x="1381272" y="2885892"/>
+            <a:ext cx="9440034" cy="1828801"/>
+          </a:xfrm>
+        </p:spPr>
+        <p:txBody>
+          <a:bodyPr>
+            <a:normAutofit/>
+          </a:bodyPr>
+          <a:lstStyle/>
+          <a:p>
+            <a:pPr rtl="1"/>
+            <a:r>
+              <a:rPr lang="fa-IR" sz="6600" b="1" dirty="0">
+                <a:solidFill>
+                  <a:srgbClr val="92D050"/>
+                </a:solidFill>
+                <a:latin typeface="IRANSans" panose="02040503050201020203" pitchFamily="18" charset="-78"/>
+                <a:cs typeface="IRANSans" panose="02040503050201020203" pitchFamily="18" charset="-78"/>
+              </a:rPr>
+              <a:t>کتابخانه رندوم</a:t>
+            </a:r>
+            <a:endParaRPr lang="en-US" sz="6600" b="1" dirty="0">
               <a:solidFill>
                 <a:srgbClr val="92D050"/>
               </a:solidFill>
@@ -6880,7 +7609,7 @@
           <p:cNvPr id="4" name="TextBox 3">
             <a:extLst>
               <a:ext uri="{FF2B5EF4-FFF2-40B4-BE49-F238E27FC236}">
-                <a16:creationId xmlns:a16="http://schemas.microsoft.com/office/drawing/2014/main" id="{79CC19DC-A4D1-56F7-08F4-160D5A70FB45}"/>
+                <a16:creationId xmlns:a16="http://schemas.microsoft.com/office/drawing/2014/main" id="{7A5220C1-1007-645D-7985-F75ED10EA4AE}"/>
               </a:ext>
             </a:extLst>
           </p:cNvPr>
@@ -6947,7 +7676,7 @@
           <p:cNvPr id="6" name="Picture 5">
             <a:extLst>
               <a:ext uri="{FF2B5EF4-FFF2-40B4-BE49-F238E27FC236}">
-                <a16:creationId xmlns:a16="http://schemas.microsoft.com/office/drawing/2014/main" id="{A04B4FB1-79B5-7FE0-813D-3B30A92B2468}"/>
+                <a16:creationId xmlns:a16="http://schemas.microsoft.com/office/drawing/2014/main" id="{94B6093E-1DCA-F908-640F-B1EAD3A88482}"/>
               </a:ext>
             </a:extLst>
           </p:cNvPr>
@@ -6957,7 +7686,7 @@
           <p:nvPr/>
         </p:nvPicPr>
         <p:blipFill>
-          <a:blip r:embed="rId2">
+          <a:blip r:embed="rId3">
             <a:extLst>
               <a:ext uri="{28A0092B-C50C-407E-A947-70E740481C1C}">
                 <a14:useLocalDpi xmlns:a14="http://schemas.microsoft.com/office/drawing/2010/main" val="0"/>
@@ -6978,45 +7707,1463 @@
           </a:prstGeom>
         </p:spPr>
       </p:pic>
-      <p:sp>
-        <p:nvSpPr>
-          <p:cNvPr id="7" name="Subtitle 6">
-            <a:extLst>
-              <a:ext uri="{FF2B5EF4-FFF2-40B4-BE49-F238E27FC236}">
-                <a16:creationId xmlns:a16="http://schemas.microsoft.com/office/drawing/2014/main" id="{D89AA7FD-2B55-55E4-A4B1-C1B937315549}"/>
-              </a:ext>
-            </a:extLst>
-          </p:cNvPr>
-          <p:cNvSpPr>
-            <a:spLocks noGrp="1"/>
-          </p:cNvSpPr>
-          <p:nvPr>
-            <p:ph type="subTitle" idx="1"/>
-          </p:nvPr>
-        </p:nvSpPr>
-        <p:spPr/>
-        <p:txBody>
-          <a:bodyPr/>
-          <a:lstStyle/>
-          <a:p>
-            <a:r>
-              <a:rPr lang="fa-IR" dirty="0"/>
-              <a:t> </a:t>
-            </a:r>
-            <a:endParaRPr lang="en-US" dirty="0"/>
-          </a:p>
-        </p:txBody>
-      </p:sp>
     </p:spTree>
     <p:extLst>
       <p:ext uri="{BB962C8B-B14F-4D97-AF65-F5344CB8AC3E}">
-        <p14:creationId xmlns:p14="http://schemas.microsoft.com/office/powerpoint/2010/main" val="4154749472"/>
+        <p14:creationId xmlns:p14="http://schemas.microsoft.com/office/powerpoint/2010/main" val="3557576496"/>
       </p:ext>
     </p:extLst>
   </p:cSld>
   <p:clrMapOvr>
     <a:masterClrMapping/>
   </p:clrMapOvr>
+</p:sld>
+</file>
+
+<file path=ppt/slides/slide14.xml><?xml version="1.0" encoding="utf-8"?>
+<p:sld xmlns:a="http://schemas.openxmlformats.org/drawingml/2006/main" xmlns:r="http://schemas.openxmlformats.org/officeDocument/2006/relationships" xmlns:p="http://schemas.openxmlformats.org/presentationml/2006/main">
+  <p:cSld>
+    <p:spTree>
+      <p:nvGrpSpPr>
+        <p:cNvPr id="1" name="">
+          <a:extLst>
+            <a:ext uri="{FF2B5EF4-FFF2-40B4-BE49-F238E27FC236}">
+              <a16:creationId xmlns:a16="http://schemas.microsoft.com/office/drawing/2014/main" id="{E9A27D83-CCE0-5025-1826-618C48165B8C}"/>
+            </a:ext>
+          </a:extLst>
+        </p:cNvPr>
+        <p:cNvGrpSpPr/>
+        <p:nvPr/>
+      </p:nvGrpSpPr>
+      <p:grpSpPr>
+        <a:xfrm>
+          <a:off x="0" y="0"/>
+          <a:ext cx="0" cy="0"/>
+          <a:chOff x="0" y="0"/>
+          <a:chExt cx="0" cy="0"/>
+        </a:xfrm>
+      </p:grpSpPr>
+      <p:sp>
+        <p:nvSpPr>
+          <p:cNvPr id="2" name="Title 1">
+            <a:extLst>
+              <a:ext uri="{FF2B5EF4-FFF2-40B4-BE49-F238E27FC236}">
+                <a16:creationId xmlns:a16="http://schemas.microsoft.com/office/drawing/2014/main" id="{0E76247A-B601-0C45-26B7-4DACB49AB45F}"/>
+              </a:ext>
+            </a:extLst>
+          </p:cNvPr>
+          <p:cNvSpPr>
+            <a:spLocks noGrp="1"/>
+          </p:cNvSpPr>
+          <p:nvPr>
+            <p:ph type="title"/>
+          </p:nvPr>
+        </p:nvSpPr>
+        <p:spPr/>
+        <p:txBody>
+          <a:bodyPr>
+            <a:normAutofit/>
+          </a:bodyPr>
+          <a:lstStyle/>
+          <a:p>
+            <a:pPr rtl="1"/>
+            <a:r>
+              <a:rPr lang="fa-IR" b="1" dirty="0">
+                <a:effectLst>
+                  <a:outerShdw blurRad="38100" dist="38100" dir="2700000" algn="tl">
+                    <a:srgbClr val="000000">
+                      <a:alpha val="43137"/>
+                    </a:srgbClr>
+                  </a:outerShdw>
+                </a:effectLst>
+                <a:latin typeface="IRANSans" panose="02040503050201020203" pitchFamily="18" charset="-78"/>
+                <a:cs typeface="IRANSans" panose="02040503050201020203" pitchFamily="18" charset="-78"/>
+              </a:rPr>
+              <a:t>ساخت یک عدد تصادفی بین 1 تا 10</a:t>
+            </a:r>
+            <a:endParaRPr lang="en-US" b="1" dirty="0">
+              <a:effectLst>
+                <a:outerShdw blurRad="38100" dist="38100" dir="2700000" algn="tl">
+                  <a:srgbClr val="000000">
+                    <a:alpha val="43137"/>
+                  </a:srgbClr>
+                </a:outerShdw>
+              </a:effectLst>
+              <a:latin typeface="IRANSans" panose="02040503050201020203" pitchFamily="18" charset="-78"/>
+              <a:cs typeface="IRANSans" panose="02040503050201020203" pitchFamily="18" charset="-78"/>
+            </a:endParaRPr>
+          </a:p>
+        </p:txBody>
+      </p:sp>
+      <p:pic>
+        <p:nvPicPr>
+          <p:cNvPr id="5" name="Content Placeholder 4">
+            <a:extLst>
+              <a:ext uri="{FF2B5EF4-FFF2-40B4-BE49-F238E27FC236}">
+                <a16:creationId xmlns:a16="http://schemas.microsoft.com/office/drawing/2014/main" id="{3BAF62A9-1968-8D0A-4360-5BE600B4B686}"/>
+              </a:ext>
+            </a:extLst>
+          </p:cNvPr>
+          <p:cNvPicPr>
+            <a:picLocks noGrp="1" noChangeAspect="1"/>
+          </p:cNvPicPr>
+          <p:nvPr>
+            <p:ph idx="1"/>
+          </p:nvPr>
+        </p:nvPicPr>
+        <p:blipFill>
+          <a:blip r:embed="rId3"/>
+          <a:stretch>
+            <a:fillRect/>
+          </a:stretch>
+        </p:blipFill>
+        <p:spPr>
+          <a:xfrm>
+            <a:off x="810735" y="2277985"/>
+            <a:ext cx="10559882" cy="3438418"/>
+          </a:xfrm>
+          <a:prstGeom prst="rect">
+            <a:avLst/>
+          </a:prstGeom>
+        </p:spPr>
+      </p:pic>
+    </p:spTree>
+    <p:extLst>
+      <p:ext uri="{BB962C8B-B14F-4D97-AF65-F5344CB8AC3E}">
+        <p14:creationId xmlns:p14="http://schemas.microsoft.com/office/powerpoint/2010/main" val="987185269"/>
+      </p:ext>
+    </p:extLst>
+  </p:cSld>
+  <p:clrMapOvr>
+    <a:masterClrMapping/>
+  </p:clrMapOvr>
+</p:sld>
+</file>
+
+<file path=ppt/slides/slide15.xml><?xml version="1.0" encoding="utf-8"?>
+<p:sld xmlns:a="http://schemas.openxmlformats.org/drawingml/2006/main" xmlns:r="http://schemas.openxmlformats.org/officeDocument/2006/relationships" xmlns:p="http://schemas.openxmlformats.org/presentationml/2006/main">
+  <p:cSld>
+    <p:spTree>
+      <p:nvGrpSpPr>
+        <p:cNvPr id="1" name="">
+          <a:extLst>
+            <a:ext uri="{FF2B5EF4-FFF2-40B4-BE49-F238E27FC236}">
+              <a16:creationId xmlns:a16="http://schemas.microsoft.com/office/drawing/2014/main" id="{6C99D127-D355-AEA0-B34E-1973CFD23A1B}"/>
+            </a:ext>
+          </a:extLst>
+        </p:cNvPr>
+        <p:cNvGrpSpPr/>
+        <p:nvPr/>
+      </p:nvGrpSpPr>
+      <p:grpSpPr>
+        <a:xfrm>
+          <a:off x="0" y="0"/>
+          <a:ext cx="0" cy="0"/>
+          <a:chOff x="0" y="0"/>
+          <a:chExt cx="0" cy="0"/>
+        </a:xfrm>
+      </p:grpSpPr>
+      <p:sp>
+        <p:nvSpPr>
+          <p:cNvPr id="2" name="Title 1">
+            <a:extLst>
+              <a:ext uri="{FF2B5EF4-FFF2-40B4-BE49-F238E27FC236}">
+                <a16:creationId xmlns:a16="http://schemas.microsoft.com/office/drawing/2014/main" id="{D1E02F33-0868-AE3C-3657-868266B4C4C9}"/>
+              </a:ext>
+            </a:extLst>
+          </p:cNvPr>
+          <p:cNvSpPr>
+            <a:spLocks noGrp="1"/>
+          </p:cNvSpPr>
+          <p:nvPr>
+            <p:ph type="title"/>
+          </p:nvPr>
+        </p:nvSpPr>
+        <p:spPr/>
+        <p:txBody>
+          <a:bodyPr>
+            <a:normAutofit/>
+          </a:bodyPr>
+          <a:lstStyle/>
+          <a:p>
+            <a:pPr rtl="1"/>
+            <a:r>
+              <a:rPr lang="fa-IR" b="1" dirty="0">
+                <a:effectLst>
+                  <a:outerShdw blurRad="38100" dist="38100" dir="2700000" algn="tl">
+                    <a:srgbClr val="000000">
+                      <a:alpha val="43137"/>
+                    </a:srgbClr>
+                  </a:outerShdw>
+                </a:effectLst>
+                <a:latin typeface="IRANSans" panose="02040503050201020203" pitchFamily="18" charset="-78"/>
+                <a:cs typeface="IRANSans" panose="02040503050201020203" pitchFamily="18" charset="-78"/>
+              </a:rPr>
+              <a:t>انتخاب یک کلمه تصادفی</a:t>
+            </a:r>
+            <a:endParaRPr lang="en-US" b="1" dirty="0">
+              <a:effectLst>
+                <a:outerShdw blurRad="38100" dist="38100" dir="2700000" algn="tl">
+                  <a:srgbClr val="000000">
+                    <a:alpha val="43137"/>
+                  </a:srgbClr>
+                </a:outerShdw>
+              </a:effectLst>
+              <a:latin typeface="IRANSans" panose="02040503050201020203" pitchFamily="18" charset="-78"/>
+              <a:cs typeface="IRANSans" panose="02040503050201020203" pitchFamily="18" charset="-78"/>
+            </a:endParaRPr>
+          </a:p>
+        </p:txBody>
+      </p:sp>
+      <p:pic>
+        <p:nvPicPr>
+          <p:cNvPr id="7" name="Content Placeholder 6">
+            <a:extLst>
+              <a:ext uri="{FF2B5EF4-FFF2-40B4-BE49-F238E27FC236}">
+                <a16:creationId xmlns:a16="http://schemas.microsoft.com/office/drawing/2014/main" id="{1D0928D4-5838-3544-027B-5BC76AAFDA64}"/>
+              </a:ext>
+            </a:extLst>
+          </p:cNvPr>
+          <p:cNvPicPr>
+            <a:picLocks noGrp="1" noChangeAspect="1"/>
+          </p:cNvPicPr>
+          <p:nvPr>
+            <p:ph idx="1"/>
+          </p:nvPr>
+        </p:nvPicPr>
+        <p:blipFill>
+          <a:blip r:embed="rId3"/>
+          <a:stretch>
+            <a:fillRect/>
+          </a:stretch>
+        </p:blipFill>
+        <p:spPr>
+          <a:xfrm>
+            <a:off x="914400" y="2431422"/>
+            <a:ext cx="10353675" cy="2660319"/>
+          </a:xfrm>
+          <a:prstGeom prst="rect">
+            <a:avLst/>
+          </a:prstGeom>
+          <a:effectLst>
+            <a:outerShdw blurRad="25400" dir="17880000">
+              <a:srgbClr val="000000">
+                <a:alpha val="46000"/>
+              </a:srgbClr>
+            </a:outerShdw>
+          </a:effectLst>
+        </p:spPr>
+      </p:pic>
+    </p:spTree>
+    <p:extLst>
+      <p:ext uri="{BB962C8B-B14F-4D97-AF65-F5344CB8AC3E}">
+        <p14:creationId xmlns:p14="http://schemas.microsoft.com/office/powerpoint/2010/main" val="1015265709"/>
+      </p:ext>
+    </p:extLst>
+  </p:cSld>
+  <p:clrMapOvr>
+    <a:masterClrMapping/>
+  </p:clrMapOvr>
+</p:sld>
+</file>
+
+<file path=ppt/slides/slide16.xml><?xml version="1.0" encoding="utf-8"?>
+<p:sld xmlns:a="http://schemas.openxmlformats.org/drawingml/2006/main" xmlns:r="http://schemas.openxmlformats.org/officeDocument/2006/relationships" xmlns:p="http://schemas.openxmlformats.org/presentationml/2006/main">
+  <p:cSld>
+    <p:spTree>
+      <p:nvGrpSpPr>
+        <p:cNvPr id="1" name="">
+          <a:extLst>
+            <a:ext uri="{FF2B5EF4-FFF2-40B4-BE49-F238E27FC236}">
+              <a16:creationId xmlns:a16="http://schemas.microsoft.com/office/drawing/2014/main" id="{6F01869D-24EA-572E-40E3-EEA73B6A1D75}"/>
+            </a:ext>
+          </a:extLst>
+        </p:cNvPr>
+        <p:cNvGrpSpPr/>
+        <p:nvPr/>
+      </p:nvGrpSpPr>
+      <p:grpSpPr>
+        <a:xfrm>
+          <a:off x="0" y="0"/>
+          <a:ext cx="0" cy="0"/>
+          <a:chOff x="0" y="0"/>
+          <a:chExt cx="0" cy="0"/>
+        </a:xfrm>
+      </p:grpSpPr>
+      <p:sp>
+        <p:nvSpPr>
+          <p:cNvPr id="2" name="Title 1">
+            <a:extLst>
+              <a:ext uri="{FF2B5EF4-FFF2-40B4-BE49-F238E27FC236}">
+                <a16:creationId xmlns:a16="http://schemas.microsoft.com/office/drawing/2014/main" id="{A98BC99A-6885-192F-CFAC-EC6E133CD690}"/>
+              </a:ext>
+            </a:extLst>
+          </p:cNvPr>
+          <p:cNvSpPr>
+            <a:spLocks noGrp="1"/>
+          </p:cNvSpPr>
+          <p:nvPr>
+            <p:ph type="title"/>
+          </p:nvPr>
+        </p:nvSpPr>
+        <p:spPr/>
+        <p:txBody>
+          <a:bodyPr>
+            <a:normAutofit/>
+          </a:bodyPr>
+          <a:lstStyle/>
+          <a:p>
+            <a:pPr rtl="1"/>
+            <a:r>
+              <a:rPr lang="fa-IR" b="1" dirty="0">
+                <a:effectLst>
+                  <a:outerShdw blurRad="38100" dist="38100" dir="2700000" algn="tl">
+                    <a:srgbClr val="000000">
+                      <a:alpha val="43137"/>
+                    </a:srgbClr>
+                  </a:outerShdw>
+                </a:effectLst>
+                <a:latin typeface="IRANSans" panose="02040503050201020203" pitchFamily="18" charset="-78"/>
+                <a:cs typeface="IRANSans" panose="02040503050201020203" pitchFamily="18" charset="-78"/>
+              </a:rPr>
+              <a:t>تمرین </a:t>
+            </a:r>
+            <a:r>
+              <a:rPr lang="en-US" b="1" dirty="0">
+                <a:effectLst>
+                  <a:outerShdw blurRad="38100" dist="38100" dir="2700000" algn="tl">
+                    <a:srgbClr val="000000">
+                      <a:alpha val="43137"/>
+                    </a:srgbClr>
+                  </a:outerShdw>
+                </a:effectLst>
+                <a:latin typeface="IRANSans" panose="02040503050201020203" pitchFamily="18" charset="-78"/>
+                <a:cs typeface="IRANSans" panose="02040503050201020203" pitchFamily="18" charset="-78"/>
+              </a:rPr>
+              <a:t>1</a:t>
+            </a:r>
+          </a:p>
+        </p:txBody>
+      </p:sp>
+      <p:sp>
+        <p:nvSpPr>
+          <p:cNvPr id="3" name="Content Placeholder 2">
+            <a:extLst>
+              <a:ext uri="{FF2B5EF4-FFF2-40B4-BE49-F238E27FC236}">
+                <a16:creationId xmlns:a16="http://schemas.microsoft.com/office/drawing/2014/main" id="{299DC443-1BD1-F11A-9D7B-FAFA8ECB4675}"/>
+              </a:ext>
+            </a:extLst>
+          </p:cNvPr>
+          <p:cNvSpPr>
+            <a:spLocks noGrp="1"/>
+          </p:cNvSpPr>
+          <p:nvPr>
+            <p:ph idx="1"/>
+          </p:nvPr>
+        </p:nvSpPr>
+        <p:spPr/>
+        <p:txBody>
+          <a:bodyPr>
+            <a:normAutofit/>
+          </a:bodyPr>
+          <a:lstStyle/>
+          <a:p>
+            <a:pPr algn="r" rtl="1">
+              <a:lnSpc>
+                <a:spcPct val="150000"/>
+              </a:lnSpc>
+            </a:pPr>
+            <a:r>
+              <a:rPr lang="fa-IR" sz="4400" dirty="0">
+                <a:latin typeface="IRANSans" panose="02040503050201020203" pitchFamily="18" charset="-78"/>
+                <a:cs typeface="IRANSans" panose="02040503050201020203" pitchFamily="18" charset="-78"/>
+              </a:rPr>
+              <a:t>یک تاس را شبیه سازی کنید. یعنی یک عدد رندوم بین 1 تا 6 بسازید و چاپ کنید.</a:t>
+            </a:r>
+            <a:endParaRPr lang="en-US" sz="4400" dirty="0">
+              <a:latin typeface="IRANSans" panose="02040503050201020203" pitchFamily="18" charset="-78"/>
+              <a:cs typeface="IRANSans" panose="02040503050201020203" pitchFamily="18" charset="-78"/>
+            </a:endParaRPr>
+          </a:p>
+          <a:p>
+            <a:pPr algn="r" rtl="1">
+              <a:lnSpc>
+                <a:spcPct val="150000"/>
+              </a:lnSpc>
+            </a:pPr>
+            <a:r>
+              <a:rPr lang="en-US" sz="4400" dirty="0">
+                <a:latin typeface="IRANSans" panose="02040503050201020203" pitchFamily="18" charset="-78"/>
+                <a:cs typeface="IRANSans" panose="02040503050201020203" pitchFamily="18" charset="-78"/>
+              </a:rPr>
+              <a:t>10.80.96.30:3007</a:t>
+            </a:r>
+            <a:endParaRPr lang="fa-IR" sz="4400" dirty="0">
+              <a:latin typeface="IRANSans" panose="02040503050201020203" pitchFamily="18" charset="-78"/>
+              <a:cs typeface="IRANSans" panose="02040503050201020203" pitchFamily="18" charset="-78"/>
+            </a:endParaRPr>
+          </a:p>
+        </p:txBody>
+      </p:sp>
+      <p:pic>
+        <p:nvPicPr>
+          <p:cNvPr id="4" name="Content Placeholder 4">
+            <a:extLst>
+              <a:ext uri="{FF2B5EF4-FFF2-40B4-BE49-F238E27FC236}">
+                <a16:creationId xmlns:a16="http://schemas.microsoft.com/office/drawing/2014/main" id="{A0239C89-94B1-E1C2-69BB-75A72BC99186}"/>
+              </a:ext>
+            </a:extLst>
+          </p:cNvPr>
+          <p:cNvPicPr>
+            <a:picLocks noChangeAspect="1"/>
+          </p:cNvPicPr>
+          <p:nvPr/>
+        </p:nvPicPr>
+        <p:blipFill>
+          <a:blip r:embed="rId2"/>
+          <a:stretch>
+            <a:fillRect/>
+          </a:stretch>
+        </p:blipFill>
+        <p:spPr>
+          <a:xfrm>
+            <a:off x="7073977" y="92144"/>
+            <a:ext cx="5037616" cy="1640305"/>
+          </a:xfrm>
+          <a:prstGeom prst="rect">
+            <a:avLst/>
+          </a:prstGeom>
+          <a:effectLst>
+            <a:outerShdw blurRad="25400" dir="17880000">
+              <a:srgbClr val="000000">
+                <a:alpha val="46000"/>
+              </a:srgbClr>
+            </a:outerShdw>
+          </a:effectLst>
+        </p:spPr>
+      </p:pic>
+    </p:spTree>
+    <p:extLst>
+      <p:ext uri="{BB962C8B-B14F-4D97-AF65-F5344CB8AC3E}">
+        <p14:creationId xmlns:p14="http://schemas.microsoft.com/office/powerpoint/2010/main" val="2855179634"/>
+      </p:ext>
+    </p:extLst>
+  </p:cSld>
+  <p:clrMapOvr>
+    <a:masterClrMapping/>
+  </p:clrMapOvr>
+  <p:timing>
+    <p:tnLst>
+      <p:par>
+        <p:cTn id="1" dur="indefinite" restart="never" nodeType="tmRoot">
+          <p:childTnLst>
+            <p:seq concurrent="1" nextAc="seek">
+              <p:cTn id="2" dur="indefinite" nodeType="mainSeq">
+                <p:childTnLst>
+                  <p:par>
+                    <p:cTn id="3" fill="hold">
+                      <p:stCondLst>
+                        <p:cond delay="indefinite"/>
+                      </p:stCondLst>
+                      <p:childTnLst>
+                        <p:par>
+                          <p:cTn id="4" fill="hold">
+                            <p:stCondLst>
+                              <p:cond delay="0"/>
+                            </p:stCondLst>
+                            <p:childTnLst>
+                              <p:par>
+                                <p:cTn id="5" presetID="10" presetClass="entr" presetSubtype="0" fill="hold" nodeType="clickEffect">
+                                  <p:stCondLst>
+                                    <p:cond delay="0"/>
+                                  </p:stCondLst>
+                                  <p:childTnLst>
+                                    <p:set>
+                                      <p:cBhvr>
+                                        <p:cTn id="6" dur="1" fill="hold">
+                                          <p:stCondLst>
+                                            <p:cond delay="0"/>
+                                          </p:stCondLst>
+                                        </p:cTn>
+                                        <p:tgtEl>
+                                          <p:spTgt spid="3">
+                                            <p:txEl>
+                                              <p:pRg st="0" end="0"/>
+                                            </p:txEl>
+                                          </p:spTgt>
+                                        </p:tgtEl>
+                                        <p:attrNameLst>
+                                          <p:attrName>style.visibility</p:attrName>
+                                        </p:attrNameLst>
+                                      </p:cBhvr>
+                                      <p:to>
+                                        <p:strVal val="visible"/>
+                                      </p:to>
+                                    </p:set>
+                                    <p:animEffect transition="in" filter="fade">
+                                      <p:cBhvr>
+                                        <p:cTn id="7" dur="500"/>
+                                        <p:tgtEl>
+                                          <p:spTgt spid="3">
+                                            <p:txEl>
+                                              <p:pRg st="0" end="0"/>
+                                            </p:txEl>
+                                          </p:spTgt>
+                                        </p:tgtEl>
+                                      </p:cBhvr>
+                                    </p:animEffect>
+                                  </p:childTnLst>
+                                </p:cTn>
+                              </p:par>
+                            </p:childTnLst>
+                          </p:cTn>
+                        </p:par>
+                      </p:childTnLst>
+                    </p:cTn>
+                  </p:par>
+                  <p:par>
+                    <p:cTn id="8" fill="hold">
+                      <p:stCondLst>
+                        <p:cond delay="indefinite"/>
+                      </p:stCondLst>
+                      <p:childTnLst>
+                        <p:par>
+                          <p:cTn id="9" fill="hold">
+                            <p:stCondLst>
+                              <p:cond delay="0"/>
+                            </p:stCondLst>
+                            <p:childTnLst>
+                              <p:par>
+                                <p:cTn id="10" presetID="10" presetClass="entr" presetSubtype="0" fill="hold" nodeType="clickEffect">
+                                  <p:stCondLst>
+                                    <p:cond delay="0"/>
+                                  </p:stCondLst>
+                                  <p:childTnLst>
+                                    <p:set>
+                                      <p:cBhvr>
+                                        <p:cTn id="11" dur="1" fill="hold">
+                                          <p:stCondLst>
+                                            <p:cond delay="0"/>
+                                          </p:stCondLst>
+                                        </p:cTn>
+                                        <p:tgtEl>
+                                          <p:spTgt spid="3">
+                                            <p:txEl>
+                                              <p:pRg st="1" end="1"/>
+                                            </p:txEl>
+                                          </p:spTgt>
+                                        </p:tgtEl>
+                                        <p:attrNameLst>
+                                          <p:attrName>style.visibility</p:attrName>
+                                        </p:attrNameLst>
+                                      </p:cBhvr>
+                                      <p:to>
+                                        <p:strVal val="visible"/>
+                                      </p:to>
+                                    </p:set>
+                                    <p:animEffect transition="in" filter="fade">
+                                      <p:cBhvr>
+                                        <p:cTn id="12" dur="500"/>
+                                        <p:tgtEl>
+                                          <p:spTgt spid="3">
+                                            <p:txEl>
+                                              <p:pRg st="1" end="1"/>
+                                            </p:txEl>
+                                          </p:spTgt>
+                                        </p:tgtEl>
+                                      </p:cBhvr>
+                                    </p:animEffect>
+                                  </p:childTnLst>
+                                </p:cTn>
+                              </p:par>
+                            </p:childTnLst>
+                          </p:cTn>
+                        </p:par>
+                      </p:childTnLst>
+                    </p:cTn>
+                  </p:par>
+                </p:childTnLst>
+              </p:cTn>
+              <p:prevCondLst>
+                <p:cond evt="onPrev" delay="0">
+                  <p:tgtEl>
+                    <p:sldTgt/>
+                  </p:tgtEl>
+                </p:cond>
+              </p:prevCondLst>
+              <p:nextCondLst>
+                <p:cond evt="onNext" delay="0">
+                  <p:tgtEl>
+                    <p:sldTgt/>
+                  </p:tgtEl>
+                </p:cond>
+              </p:nextCondLst>
+            </p:seq>
+          </p:childTnLst>
+        </p:cTn>
+      </p:par>
+    </p:tnLst>
+  </p:timing>
+</p:sld>
+</file>
+
+<file path=ppt/slides/slide17.xml><?xml version="1.0" encoding="utf-8"?>
+<p:sld xmlns:a="http://schemas.openxmlformats.org/drawingml/2006/main" xmlns:r="http://schemas.openxmlformats.org/officeDocument/2006/relationships" xmlns:p="http://schemas.openxmlformats.org/presentationml/2006/main">
+  <p:cSld>
+    <p:spTree>
+      <p:nvGrpSpPr>
+        <p:cNvPr id="1" name="">
+          <a:extLst>
+            <a:ext uri="{FF2B5EF4-FFF2-40B4-BE49-F238E27FC236}">
+              <a16:creationId xmlns:a16="http://schemas.microsoft.com/office/drawing/2014/main" id="{A89638AD-29D0-6933-D500-CBCA4798426E}"/>
+            </a:ext>
+          </a:extLst>
+        </p:cNvPr>
+        <p:cNvGrpSpPr/>
+        <p:nvPr/>
+      </p:nvGrpSpPr>
+      <p:grpSpPr>
+        <a:xfrm>
+          <a:off x="0" y="0"/>
+          <a:ext cx="0" cy="0"/>
+          <a:chOff x="0" y="0"/>
+          <a:chExt cx="0" cy="0"/>
+        </a:xfrm>
+      </p:grpSpPr>
+      <p:sp>
+        <p:nvSpPr>
+          <p:cNvPr id="2" name="Title 1">
+            <a:extLst>
+              <a:ext uri="{FF2B5EF4-FFF2-40B4-BE49-F238E27FC236}">
+                <a16:creationId xmlns:a16="http://schemas.microsoft.com/office/drawing/2014/main" id="{BE608BB0-938A-C678-128F-2470CEA777EB}"/>
+              </a:ext>
+            </a:extLst>
+          </p:cNvPr>
+          <p:cNvSpPr>
+            <a:spLocks noGrp="1"/>
+          </p:cNvSpPr>
+          <p:nvPr>
+            <p:ph type="title"/>
+          </p:nvPr>
+        </p:nvSpPr>
+        <p:spPr/>
+        <p:txBody>
+          <a:bodyPr>
+            <a:normAutofit/>
+          </a:bodyPr>
+          <a:lstStyle/>
+          <a:p>
+            <a:pPr rtl="1"/>
+            <a:r>
+              <a:rPr lang="fa-IR" b="1" dirty="0">
+                <a:effectLst>
+                  <a:outerShdw blurRad="38100" dist="38100" dir="2700000" algn="tl">
+                    <a:srgbClr val="000000">
+                      <a:alpha val="43137"/>
+                    </a:srgbClr>
+                  </a:outerShdw>
+                </a:effectLst>
+                <a:latin typeface="IRANSans" panose="02040503050201020203" pitchFamily="18" charset="-78"/>
+                <a:cs typeface="IRANSans" panose="02040503050201020203" pitchFamily="18" charset="-78"/>
+              </a:rPr>
+              <a:t>تمرین 2</a:t>
+            </a:r>
+            <a:endParaRPr lang="en-US" b="1" dirty="0">
+              <a:effectLst>
+                <a:outerShdw blurRad="38100" dist="38100" dir="2700000" algn="tl">
+                  <a:srgbClr val="000000">
+                    <a:alpha val="43137"/>
+                  </a:srgbClr>
+                </a:outerShdw>
+              </a:effectLst>
+              <a:latin typeface="IRANSans" panose="02040503050201020203" pitchFamily="18" charset="-78"/>
+              <a:cs typeface="IRANSans" panose="02040503050201020203" pitchFamily="18" charset="-78"/>
+            </a:endParaRPr>
+          </a:p>
+        </p:txBody>
+      </p:sp>
+      <p:sp>
+        <p:nvSpPr>
+          <p:cNvPr id="3" name="Content Placeholder 2">
+            <a:extLst>
+              <a:ext uri="{FF2B5EF4-FFF2-40B4-BE49-F238E27FC236}">
+                <a16:creationId xmlns:a16="http://schemas.microsoft.com/office/drawing/2014/main" id="{06E2BBCE-FEB6-2810-0681-887A2A455966}"/>
+              </a:ext>
+            </a:extLst>
+          </p:cNvPr>
+          <p:cNvSpPr>
+            <a:spLocks noGrp="1"/>
+          </p:cNvSpPr>
+          <p:nvPr>
+            <p:ph idx="1"/>
+          </p:nvPr>
+        </p:nvSpPr>
+        <p:spPr/>
+        <p:txBody>
+          <a:bodyPr>
+            <a:normAutofit/>
+          </a:bodyPr>
+          <a:lstStyle/>
+          <a:p>
+            <a:pPr algn="r" rtl="1">
+              <a:lnSpc>
+                <a:spcPct val="150000"/>
+              </a:lnSpc>
+            </a:pPr>
+            <a:r>
+              <a:rPr lang="fa-IR" sz="3200" dirty="0">
+                <a:latin typeface="IRANSans" panose="02040503050201020203" pitchFamily="18" charset="-78"/>
+                <a:cs typeface="IRANSans" panose="02040503050201020203" pitchFamily="18" charset="-78"/>
+              </a:rPr>
+              <a:t>یک سکه را شبیه سازی کنید. یعنی بین دو کلمه شیر یا خط به صورت رندوم یکی را چاپ کنید.</a:t>
+            </a:r>
+            <a:endParaRPr lang="en-US" sz="3200" dirty="0">
+              <a:latin typeface="IRANSans" panose="02040503050201020203" pitchFamily="18" charset="-78"/>
+              <a:cs typeface="IRANSans" panose="02040503050201020203" pitchFamily="18" charset="-78"/>
+            </a:endParaRPr>
+          </a:p>
+          <a:p>
+            <a:pPr algn="r" rtl="1">
+              <a:lnSpc>
+                <a:spcPct val="150000"/>
+              </a:lnSpc>
+            </a:pPr>
+            <a:r>
+              <a:rPr lang="en-US" sz="3200" dirty="0">
+                <a:latin typeface="IRANSans" panose="02040503050201020203" pitchFamily="18" charset="-78"/>
+                <a:cs typeface="IRANSans" panose="02040503050201020203" pitchFamily="18" charset="-78"/>
+              </a:rPr>
+              <a:t>10.80.96.30:3007</a:t>
+            </a:r>
+            <a:endParaRPr lang="fa-IR" sz="3200" dirty="0">
+              <a:latin typeface="IRANSans" panose="02040503050201020203" pitchFamily="18" charset="-78"/>
+              <a:cs typeface="IRANSans" panose="02040503050201020203" pitchFamily="18" charset="-78"/>
+            </a:endParaRPr>
+          </a:p>
+          <a:p>
+            <a:pPr algn="r" rtl="1">
+              <a:lnSpc>
+                <a:spcPct val="150000"/>
+              </a:lnSpc>
+            </a:pPr>
+            <a:endParaRPr lang="en-US" sz="3200" dirty="0">
+              <a:latin typeface="IRANSans" panose="02040503050201020203" pitchFamily="18" charset="-78"/>
+              <a:cs typeface="IRANSans" panose="02040503050201020203" pitchFamily="18" charset="-78"/>
+            </a:endParaRPr>
+          </a:p>
+        </p:txBody>
+      </p:sp>
+      <p:pic>
+        <p:nvPicPr>
+          <p:cNvPr id="4" name="Content Placeholder 6">
+            <a:extLst>
+              <a:ext uri="{FF2B5EF4-FFF2-40B4-BE49-F238E27FC236}">
+                <a16:creationId xmlns:a16="http://schemas.microsoft.com/office/drawing/2014/main" id="{5E0FBA1E-7F91-6F60-9568-25DB3D7C4179}"/>
+              </a:ext>
+            </a:extLst>
+          </p:cNvPr>
+          <p:cNvPicPr>
+            <a:picLocks noChangeAspect="1"/>
+          </p:cNvPicPr>
+          <p:nvPr/>
+        </p:nvPicPr>
+        <p:blipFill>
+          <a:blip r:embed="rId2"/>
+          <a:stretch>
+            <a:fillRect/>
+          </a:stretch>
+        </p:blipFill>
+        <p:spPr>
+          <a:xfrm>
+            <a:off x="1217329" y="4108756"/>
+            <a:ext cx="9553541" cy="2454729"/>
+          </a:xfrm>
+          <a:prstGeom prst="rect">
+            <a:avLst/>
+          </a:prstGeom>
+          <a:effectLst>
+            <a:outerShdw blurRad="25400" dir="17880000">
+              <a:srgbClr val="000000">
+                <a:alpha val="46000"/>
+              </a:srgbClr>
+            </a:outerShdw>
+          </a:effectLst>
+        </p:spPr>
+      </p:pic>
+    </p:spTree>
+    <p:extLst>
+      <p:ext uri="{BB962C8B-B14F-4D97-AF65-F5344CB8AC3E}">
+        <p14:creationId xmlns:p14="http://schemas.microsoft.com/office/powerpoint/2010/main" val="3602863865"/>
+      </p:ext>
+    </p:extLst>
+  </p:cSld>
+  <p:clrMapOvr>
+    <a:masterClrMapping/>
+  </p:clrMapOvr>
+  <p:timing>
+    <p:tnLst>
+      <p:par>
+        <p:cTn id="1" dur="indefinite" restart="never" nodeType="tmRoot">
+          <p:childTnLst>
+            <p:seq concurrent="1" nextAc="seek">
+              <p:cTn id="2" dur="indefinite" nodeType="mainSeq">
+                <p:childTnLst>
+                  <p:par>
+                    <p:cTn id="3" fill="hold">
+                      <p:stCondLst>
+                        <p:cond delay="indefinite"/>
+                      </p:stCondLst>
+                      <p:childTnLst>
+                        <p:par>
+                          <p:cTn id="4" fill="hold">
+                            <p:stCondLst>
+                              <p:cond delay="0"/>
+                            </p:stCondLst>
+                            <p:childTnLst>
+                              <p:par>
+                                <p:cTn id="5" presetID="10" presetClass="entr" presetSubtype="0" fill="hold" nodeType="clickEffect">
+                                  <p:stCondLst>
+                                    <p:cond delay="0"/>
+                                  </p:stCondLst>
+                                  <p:childTnLst>
+                                    <p:set>
+                                      <p:cBhvr>
+                                        <p:cTn id="6" dur="1" fill="hold">
+                                          <p:stCondLst>
+                                            <p:cond delay="0"/>
+                                          </p:stCondLst>
+                                        </p:cTn>
+                                        <p:tgtEl>
+                                          <p:spTgt spid="3">
+                                            <p:txEl>
+                                              <p:pRg st="0" end="0"/>
+                                            </p:txEl>
+                                          </p:spTgt>
+                                        </p:tgtEl>
+                                        <p:attrNameLst>
+                                          <p:attrName>style.visibility</p:attrName>
+                                        </p:attrNameLst>
+                                      </p:cBhvr>
+                                      <p:to>
+                                        <p:strVal val="visible"/>
+                                      </p:to>
+                                    </p:set>
+                                    <p:animEffect transition="in" filter="fade">
+                                      <p:cBhvr>
+                                        <p:cTn id="7" dur="500"/>
+                                        <p:tgtEl>
+                                          <p:spTgt spid="3">
+                                            <p:txEl>
+                                              <p:pRg st="0" end="0"/>
+                                            </p:txEl>
+                                          </p:spTgt>
+                                        </p:tgtEl>
+                                      </p:cBhvr>
+                                    </p:animEffect>
+                                  </p:childTnLst>
+                                </p:cTn>
+                              </p:par>
+                            </p:childTnLst>
+                          </p:cTn>
+                        </p:par>
+                      </p:childTnLst>
+                    </p:cTn>
+                  </p:par>
+                  <p:par>
+                    <p:cTn id="8" fill="hold">
+                      <p:stCondLst>
+                        <p:cond delay="indefinite"/>
+                      </p:stCondLst>
+                      <p:childTnLst>
+                        <p:par>
+                          <p:cTn id="9" fill="hold">
+                            <p:stCondLst>
+                              <p:cond delay="0"/>
+                            </p:stCondLst>
+                            <p:childTnLst>
+                              <p:par>
+                                <p:cTn id="10" presetID="10" presetClass="entr" presetSubtype="0" fill="hold" nodeType="clickEffect">
+                                  <p:stCondLst>
+                                    <p:cond delay="0"/>
+                                  </p:stCondLst>
+                                  <p:childTnLst>
+                                    <p:set>
+                                      <p:cBhvr>
+                                        <p:cTn id="11" dur="1" fill="hold">
+                                          <p:stCondLst>
+                                            <p:cond delay="0"/>
+                                          </p:stCondLst>
+                                        </p:cTn>
+                                        <p:tgtEl>
+                                          <p:spTgt spid="3">
+                                            <p:txEl>
+                                              <p:pRg st="1" end="1"/>
+                                            </p:txEl>
+                                          </p:spTgt>
+                                        </p:tgtEl>
+                                        <p:attrNameLst>
+                                          <p:attrName>style.visibility</p:attrName>
+                                        </p:attrNameLst>
+                                      </p:cBhvr>
+                                      <p:to>
+                                        <p:strVal val="visible"/>
+                                      </p:to>
+                                    </p:set>
+                                    <p:animEffect transition="in" filter="fade">
+                                      <p:cBhvr>
+                                        <p:cTn id="12" dur="500"/>
+                                        <p:tgtEl>
+                                          <p:spTgt spid="3">
+                                            <p:txEl>
+                                              <p:pRg st="1" end="1"/>
+                                            </p:txEl>
+                                          </p:spTgt>
+                                        </p:tgtEl>
+                                      </p:cBhvr>
+                                    </p:animEffect>
+                                  </p:childTnLst>
+                                </p:cTn>
+                              </p:par>
+                            </p:childTnLst>
+                          </p:cTn>
+                        </p:par>
+                      </p:childTnLst>
+                    </p:cTn>
+                  </p:par>
+                </p:childTnLst>
+              </p:cTn>
+              <p:prevCondLst>
+                <p:cond evt="onPrev" delay="0">
+                  <p:tgtEl>
+                    <p:sldTgt/>
+                  </p:tgtEl>
+                </p:cond>
+              </p:prevCondLst>
+              <p:nextCondLst>
+                <p:cond evt="onNext" delay="0">
+                  <p:tgtEl>
+                    <p:sldTgt/>
+                  </p:tgtEl>
+                </p:cond>
+              </p:nextCondLst>
+            </p:seq>
+          </p:childTnLst>
+        </p:cTn>
+      </p:par>
+    </p:tnLst>
+  </p:timing>
+</p:sld>
+</file>
+
+<file path=ppt/slides/slide18.xml><?xml version="1.0" encoding="utf-8"?>
+<p:sld xmlns:a="http://schemas.openxmlformats.org/drawingml/2006/main" xmlns:r="http://schemas.openxmlformats.org/officeDocument/2006/relationships" xmlns:p="http://schemas.openxmlformats.org/presentationml/2006/main">
+  <p:cSld>
+    <p:spTree>
+      <p:nvGrpSpPr>
+        <p:cNvPr id="1" name="">
+          <a:extLst>
+            <a:ext uri="{FF2B5EF4-FFF2-40B4-BE49-F238E27FC236}">
+              <a16:creationId xmlns:a16="http://schemas.microsoft.com/office/drawing/2014/main" id="{D7BCB13E-7524-1DCC-3AEB-AC2F25EC862A}"/>
+            </a:ext>
+          </a:extLst>
+        </p:cNvPr>
+        <p:cNvGrpSpPr/>
+        <p:nvPr/>
+      </p:nvGrpSpPr>
+      <p:grpSpPr>
+        <a:xfrm>
+          <a:off x="0" y="0"/>
+          <a:ext cx="0" cy="0"/>
+          <a:chOff x="0" y="0"/>
+          <a:chExt cx="0" cy="0"/>
+        </a:xfrm>
+      </p:grpSpPr>
+      <p:sp>
+        <p:nvSpPr>
+          <p:cNvPr id="2" name="Title 1">
+            <a:extLst>
+              <a:ext uri="{FF2B5EF4-FFF2-40B4-BE49-F238E27FC236}">
+                <a16:creationId xmlns:a16="http://schemas.microsoft.com/office/drawing/2014/main" id="{BE3D85FB-D492-9256-FD08-C7B9A332F1A5}"/>
+              </a:ext>
+            </a:extLst>
+          </p:cNvPr>
+          <p:cNvSpPr>
+            <a:spLocks noGrp="1"/>
+          </p:cNvSpPr>
+          <p:nvPr>
+            <p:ph type="title"/>
+          </p:nvPr>
+        </p:nvSpPr>
+        <p:spPr/>
+        <p:txBody>
+          <a:bodyPr>
+            <a:normAutofit/>
+          </a:bodyPr>
+          <a:lstStyle/>
+          <a:p>
+            <a:pPr rtl="1"/>
+            <a:r>
+              <a:rPr lang="fa-IR" b="1" dirty="0">
+                <a:effectLst>
+                  <a:outerShdw blurRad="38100" dist="38100" dir="2700000" algn="tl">
+                    <a:srgbClr val="000000">
+                      <a:alpha val="43137"/>
+                    </a:srgbClr>
+                  </a:outerShdw>
+                </a:effectLst>
+                <a:latin typeface="IRANSans" panose="02040503050201020203" pitchFamily="18" charset="-78"/>
+                <a:cs typeface="IRANSans" panose="02040503050201020203" pitchFamily="18" charset="-78"/>
+              </a:rPr>
+              <a:t>تمرین 3</a:t>
+            </a:r>
+            <a:endParaRPr lang="en-US" b="1" dirty="0">
+              <a:effectLst>
+                <a:outerShdw blurRad="38100" dist="38100" dir="2700000" algn="tl">
+                  <a:srgbClr val="000000">
+                    <a:alpha val="43137"/>
+                  </a:srgbClr>
+                </a:outerShdw>
+              </a:effectLst>
+              <a:latin typeface="IRANSans" panose="02040503050201020203" pitchFamily="18" charset="-78"/>
+              <a:cs typeface="IRANSans" panose="02040503050201020203" pitchFamily="18" charset="-78"/>
+            </a:endParaRPr>
+          </a:p>
+        </p:txBody>
+      </p:sp>
+      <p:sp>
+        <p:nvSpPr>
+          <p:cNvPr id="3" name="Content Placeholder 2">
+            <a:extLst>
+              <a:ext uri="{FF2B5EF4-FFF2-40B4-BE49-F238E27FC236}">
+                <a16:creationId xmlns:a16="http://schemas.microsoft.com/office/drawing/2014/main" id="{5E0DC6FB-0200-DB33-CDC2-FE866F530922}"/>
+              </a:ext>
+            </a:extLst>
+          </p:cNvPr>
+          <p:cNvSpPr>
+            <a:spLocks noGrp="1"/>
+          </p:cNvSpPr>
+          <p:nvPr>
+            <p:ph idx="1"/>
+          </p:nvPr>
+        </p:nvSpPr>
+        <p:spPr/>
+        <p:txBody>
+          <a:bodyPr>
+            <a:normAutofit/>
+          </a:bodyPr>
+          <a:lstStyle/>
+          <a:p>
+            <a:pPr algn="r" rtl="1">
+              <a:lnSpc>
+                <a:spcPct val="150000"/>
+              </a:lnSpc>
+            </a:pPr>
+            <a:r>
+              <a:rPr lang="fa-IR" sz="4400" dirty="0">
+                <a:latin typeface="IRANSans" panose="02040503050201020203" pitchFamily="18" charset="-78"/>
+                <a:cs typeface="IRANSans" panose="02040503050201020203" pitchFamily="18" charset="-78"/>
+              </a:rPr>
+              <a:t>برنامه ای بنویسید که به صورت رندوم شام امشب را انتخاب کند. </a:t>
+            </a:r>
+          </a:p>
+          <a:p>
+            <a:pPr algn="r" rtl="1">
+              <a:lnSpc>
+                <a:spcPct val="150000"/>
+              </a:lnSpc>
+            </a:pPr>
+            <a:r>
+              <a:rPr lang="fa-IR" sz="4400" dirty="0">
+                <a:latin typeface="IRANSans" panose="02040503050201020203" pitchFamily="18" charset="-78"/>
+                <a:cs typeface="IRANSans" panose="02040503050201020203" pitchFamily="18" charset="-78"/>
+              </a:rPr>
+              <a:t>لازانیا، پیتزا، برگر، پاستا، استیک</a:t>
+            </a:r>
+          </a:p>
+        </p:txBody>
+      </p:sp>
+    </p:spTree>
+    <p:extLst>
+      <p:ext uri="{BB962C8B-B14F-4D97-AF65-F5344CB8AC3E}">
+        <p14:creationId xmlns:p14="http://schemas.microsoft.com/office/powerpoint/2010/main" val="3288677123"/>
+      </p:ext>
+    </p:extLst>
+  </p:cSld>
+  <p:clrMapOvr>
+    <a:masterClrMapping/>
+  </p:clrMapOvr>
+  <p:timing>
+    <p:tnLst>
+      <p:par>
+        <p:cTn id="1" dur="indefinite" restart="never" nodeType="tmRoot">
+          <p:childTnLst>
+            <p:seq concurrent="1" nextAc="seek">
+              <p:cTn id="2" dur="indefinite" nodeType="mainSeq">
+                <p:childTnLst>
+                  <p:par>
+                    <p:cTn id="3" fill="hold">
+                      <p:stCondLst>
+                        <p:cond delay="indefinite"/>
+                      </p:stCondLst>
+                      <p:childTnLst>
+                        <p:par>
+                          <p:cTn id="4" fill="hold">
+                            <p:stCondLst>
+                              <p:cond delay="0"/>
+                            </p:stCondLst>
+                            <p:childTnLst>
+                              <p:par>
+                                <p:cTn id="5" presetID="10" presetClass="entr" presetSubtype="0" fill="hold" nodeType="clickEffect">
+                                  <p:stCondLst>
+                                    <p:cond delay="0"/>
+                                  </p:stCondLst>
+                                  <p:childTnLst>
+                                    <p:set>
+                                      <p:cBhvr>
+                                        <p:cTn id="6" dur="1" fill="hold">
+                                          <p:stCondLst>
+                                            <p:cond delay="0"/>
+                                          </p:stCondLst>
+                                        </p:cTn>
+                                        <p:tgtEl>
+                                          <p:spTgt spid="3">
+                                            <p:txEl>
+                                              <p:pRg st="0" end="0"/>
+                                            </p:txEl>
+                                          </p:spTgt>
+                                        </p:tgtEl>
+                                        <p:attrNameLst>
+                                          <p:attrName>style.visibility</p:attrName>
+                                        </p:attrNameLst>
+                                      </p:cBhvr>
+                                      <p:to>
+                                        <p:strVal val="visible"/>
+                                      </p:to>
+                                    </p:set>
+                                    <p:animEffect transition="in" filter="fade">
+                                      <p:cBhvr>
+                                        <p:cTn id="7" dur="500"/>
+                                        <p:tgtEl>
+                                          <p:spTgt spid="3">
+                                            <p:txEl>
+                                              <p:pRg st="0" end="0"/>
+                                            </p:txEl>
+                                          </p:spTgt>
+                                        </p:tgtEl>
+                                      </p:cBhvr>
+                                    </p:animEffect>
+                                  </p:childTnLst>
+                                </p:cTn>
+                              </p:par>
+                            </p:childTnLst>
+                          </p:cTn>
+                        </p:par>
+                      </p:childTnLst>
+                    </p:cTn>
+                  </p:par>
+                  <p:par>
+                    <p:cTn id="8" fill="hold">
+                      <p:stCondLst>
+                        <p:cond delay="indefinite"/>
+                      </p:stCondLst>
+                      <p:childTnLst>
+                        <p:par>
+                          <p:cTn id="9" fill="hold">
+                            <p:stCondLst>
+                              <p:cond delay="0"/>
+                            </p:stCondLst>
+                            <p:childTnLst>
+                              <p:par>
+                                <p:cTn id="10" presetID="10" presetClass="entr" presetSubtype="0" fill="hold" nodeType="clickEffect">
+                                  <p:stCondLst>
+                                    <p:cond delay="0"/>
+                                  </p:stCondLst>
+                                  <p:childTnLst>
+                                    <p:set>
+                                      <p:cBhvr>
+                                        <p:cTn id="11" dur="1" fill="hold">
+                                          <p:stCondLst>
+                                            <p:cond delay="0"/>
+                                          </p:stCondLst>
+                                        </p:cTn>
+                                        <p:tgtEl>
+                                          <p:spTgt spid="3">
+                                            <p:txEl>
+                                              <p:pRg st="1" end="1"/>
+                                            </p:txEl>
+                                          </p:spTgt>
+                                        </p:tgtEl>
+                                        <p:attrNameLst>
+                                          <p:attrName>style.visibility</p:attrName>
+                                        </p:attrNameLst>
+                                      </p:cBhvr>
+                                      <p:to>
+                                        <p:strVal val="visible"/>
+                                      </p:to>
+                                    </p:set>
+                                    <p:animEffect transition="in" filter="fade">
+                                      <p:cBhvr>
+                                        <p:cTn id="12" dur="500"/>
+                                        <p:tgtEl>
+                                          <p:spTgt spid="3">
+                                            <p:txEl>
+                                              <p:pRg st="1" end="1"/>
+                                            </p:txEl>
+                                          </p:spTgt>
+                                        </p:tgtEl>
+                                      </p:cBhvr>
+                                    </p:animEffect>
+                                  </p:childTnLst>
+                                </p:cTn>
+                              </p:par>
+                            </p:childTnLst>
+                          </p:cTn>
+                        </p:par>
+                      </p:childTnLst>
+                    </p:cTn>
+                  </p:par>
+                </p:childTnLst>
+              </p:cTn>
+              <p:prevCondLst>
+                <p:cond evt="onPrev" delay="0">
+                  <p:tgtEl>
+                    <p:sldTgt/>
+                  </p:tgtEl>
+                </p:cond>
+              </p:prevCondLst>
+              <p:nextCondLst>
+                <p:cond evt="onNext" delay="0">
+                  <p:tgtEl>
+                    <p:sldTgt/>
+                  </p:tgtEl>
+                </p:cond>
+              </p:nextCondLst>
+            </p:seq>
+          </p:childTnLst>
+        </p:cTn>
+      </p:par>
+    </p:tnLst>
+  </p:timing>
+</p:sld>
+</file>
+
+<file path=ppt/slides/slide19.xml><?xml version="1.0" encoding="utf-8"?>
+<p:sld xmlns:a="http://schemas.openxmlformats.org/drawingml/2006/main" xmlns:r="http://schemas.openxmlformats.org/officeDocument/2006/relationships" xmlns:p="http://schemas.openxmlformats.org/presentationml/2006/main">
+  <p:cSld>
+    <p:spTree>
+      <p:nvGrpSpPr>
+        <p:cNvPr id="1" name="">
+          <a:extLst>
+            <a:ext uri="{FF2B5EF4-FFF2-40B4-BE49-F238E27FC236}">
+              <a16:creationId xmlns:a16="http://schemas.microsoft.com/office/drawing/2014/main" id="{C767CEA2-B325-C9D4-EADC-201A9FA49E5C}"/>
+            </a:ext>
+          </a:extLst>
+        </p:cNvPr>
+        <p:cNvGrpSpPr/>
+        <p:nvPr/>
+      </p:nvGrpSpPr>
+      <p:grpSpPr>
+        <a:xfrm>
+          <a:off x="0" y="0"/>
+          <a:ext cx="0" cy="0"/>
+          <a:chOff x="0" y="0"/>
+          <a:chExt cx="0" cy="0"/>
+        </a:xfrm>
+      </p:grpSpPr>
+      <p:sp>
+        <p:nvSpPr>
+          <p:cNvPr id="2" name="Title 1">
+            <a:extLst>
+              <a:ext uri="{FF2B5EF4-FFF2-40B4-BE49-F238E27FC236}">
+                <a16:creationId xmlns:a16="http://schemas.microsoft.com/office/drawing/2014/main" id="{6D5E202A-F706-26D3-462F-354B4AE4681A}"/>
+              </a:ext>
+            </a:extLst>
+          </p:cNvPr>
+          <p:cNvSpPr>
+            <a:spLocks noGrp="1"/>
+          </p:cNvSpPr>
+          <p:nvPr>
+            <p:ph type="title"/>
+          </p:nvPr>
+        </p:nvSpPr>
+        <p:spPr/>
+        <p:txBody>
+          <a:bodyPr>
+            <a:normAutofit/>
+          </a:bodyPr>
+          <a:lstStyle/>
+          <a:p>
+            <a:pPr rtl="1"/>
+            <a:r>
+              <a:rPr lang="fa-IR" b="1" dirty="0">
+                <a:effectLst>
+                  <a:outerShdw blurRad="38100" dist="38100" dir="2700000" algn="tl">
+                    <a:srgbClr val="000000">
+                      <a:alpha val="43137"/>
+                    </a:srgbClr>
+                  </a:outerShdw>
+                </a:effectLst>
+                <a:latin typeface="IRANSans" panose="02040503050201020203" pitchFamily="18" charset="-78"/>
+                <a:cs typeface="IRANSans" panose="02040503050201020203" pitchFamily="18" charset="-78"/>
+              </a:rPr>
+              <a:t>تمرین </a:t>
+            </a:r>
+            <a:r>
+              <a:rPr lang="en-US" b="1" dirty="0">
+                <a:effectLst>
+                  <a:outerShdw blurRad="38100" dist="38100" dir="2700000" algn="tl">
+                    <a:srgbClr val="000000">
+                      <a:alpha val="43137"/>
+                    </a:srgbClr>
+                  </a:outerShdw>
+                </a:effectLst>
+                <a:latin typeface="IRANSans" panose="02040503050201020203" pitchFamily="18" charset="-78"/>
+                <a:cs typeface="IRANSans" panose="02040503050201020203" pitchFamily="18" charset="-78"/>
+              </a:rPr>
+              <a:t>4</a:t>
+            </a:r>
+          </a:p>
+        </p:txBody>
+      </p:sp>
+      <p:sp>
+        <p:nvSpPr>
+          <p:cNvPr id="3" name="Content Placeholder 2">
+            <a:extLst>
+              <a:ext uri="{FF2B5EF4-FFF2-40B4-BE49-F238E27FC236}">
+                <a16:creationId xmlns:a16="http://schemas.microsoft.com/office/drawing/2014/main" id="{E75F18DE-FFB0-E06C-2108-CA97FDC3C764}"/>
+              </a:ext>
+            </a:extLst>
+          </p:cNvPr>
+          <p:cNvSpPr>
+            <a:spLocks noGrp="1"/>
+          </p:cNvSpPr>
+          <p:nvPr>
+            <p:ph idx="1"/>
+          </p:nvPr>
+        </p:nvSpPr>
+        <p:spPr/>
+        <p:txBody>
+          <a:bodyPr>
+            <a:normAutofit/>
+          </a:bodyPr>
+          <a:lstStyle/>
+          <a:p>
+            <a:pPr algn="r" rtl="1">
+              <a:lnSpc>
+                <a:spcPct val="150000"/>
+              </a:lnSpc>
+            </a:pPr>
+            <a:r>
+              <a:rPr lang="fa-IR" sz="3600" dirty="0">
+                <a:latin typeface="IRANSans" panose="02040503050201020203" pitchFamily="18" charset="-78"/>
+                <a:cs typeface="IRANSans" panose="02040503050201020203" pitchFamily="18" charset="-78"/>
+              </a:rPr>
+              <a:t>یک بازی سنگ کاغذ قیچی بسازید. به این صورت که اول یک کلمه ورودی از کاربر بگیرد و سپس خود کامپیوتر به صورت تصادفی سنگ، کاغذ یا قیچی را انتخاب کند. در نهایت برنده بازی را مشخص کند.</a:t>
+            </a:r>
+          </a:p>
+        </p:txBody>
+      </p:sp>
+    </p:spTree>
+    <p:extLst>
+      <p:ext uri="{BB962C8B-B14F-4D97-AF65-F5344CB8AC3E}">
+        <p14:creationId xmlns:p14="http://schemas.microsoft.com/office/powerpoint/2010/main" val="4003382651"/>
+      </p:ext>
+    </p:extLst>
+  </p:cSld>
+  <p:clrMapOvr>
+    <a:masterClrMapping/>
+  </p:clrMapOvr>
+  <p:timing>
+    <p:tnLst>
+      <p:par>
+        <p:cTn id="1" dur="indefinite" restart="never" nodeType="tmRoot">
+          <p:childTnLst>
+            <p:seq concurrent="1" nextAc="seek">
+              <p:cTn id="2" dur="indefinite" nodeType="mainSeq">
+                <p:childTnLst>
+                  <p:par>
+                    <p:cTn id="3" fill="hold">
+                      <p:stCondLst>
+                        <p:cond delay="indefinite"/>
+                      </p:stCondLst>
+                      <p:childTnLst>
+                        <p:par>
+                          <p:cTn id="4" fill="hold">
+                            <p:stCondLst>
+                              <p:cond delay="0"/>
+                            </p:stCondLst>
+                            <p:childTnLst>
+                              <p:par>
+                                <p:cTn id="5" presetID="10" presetClass="entr" presetSubtype="0" fill="hold" nodeType="clickEffect">
+                                  <p:stCondLst>
+                                    <p:cond delay="0"/>
+                                  </p:stCondLst>
+                                  <p:childTnLst>
+                                    <p:set>
+                                      <p:cBhvr>
+                                        <p:cTn id="6" dur="1" fill="hold">
+                                          <p:stCondLst>
+                                            <p:cond delay="0"/>
+                                          </p:stCondLst>
+                                        </p:cTn>
+                                        <p:tgtEl>
+                                          <p:spTgt spid="3">
+                                            <p:txEl>
+                                              <p:pRg st="0" end="0"/>
+                                            </p:txEl>
+                                          </p:spTgt>
+                                        </p:tgtEl>
+                                        <p:attrNameLst>
+                                          <p:attrName>style.visibility</p:attrName>
+                                        </p:attrNameLst>
+                                      </p:cBhvr>
+                                      <p:to>
+                                        <p:strVal val="visible"/>
+                                      </p:to>
+                                    </p:set>
+                                    <p:animEffect transition="in" filter="fade">
+                                      <p:cBhvr>
+                                        <p:cTn id="7" dur="500"/>
+                                        <p:tgtEl>
+                                          <p:spTgt spid="3">
+                                            <p:txEl>
+                                              <p:pRg st="0" end="0"/>
+                                            </p:txEl>
+                                          </p:spTgt>
+                                        </p:tgtEl>
+                                      </p:cBhvr>
+                                    </p:animEffect>
+                                  </p:childTnLst>
+                                </p:cTn>
+                              </p:par>
+                            </p:childTnLst>
+                          </p:cTn>
+                        </p:par>
+                      </p:childTnLst>
+                    </p:cTn>
+                  </p:par>
+                </p:childTnLst>
+              </p:cTn>
+              <p:prevCondLst>
+                <p:cond evt="onPrev" delay="0">
+                  <p:tgtEl>
+                    <p:sldTgt/>
+                  </p:tgtEl>
+                </p:cond>
+              </p:prevCondLst>
+              <p:nextCondLst>
+                <p:cond evt="onNext" delay="0">
+                  <p:tgtEl>
+                    <p:sldTgt/>
+                  </p:tgtEl>
+                </p:cond>
+              </p:nextCondLst>
+            </p:seq>
+          </p:childTnLst>
+        </p:cTn>
+      </p:par>
+    </p:tnLst>
+  </p:timing>
 </p:sld>
 </file>
 
@@ -7586,6 +9733,440 @@
     <p:extLst>
       <p:ext uri="{BB962C8B-B14F-4D97-AF65-F5344CB8AC3E}">
         <p14:creationId xmlns:p14="http://schemas.microsoft.com/office/powerpoint/2010/main" val="3083525120"/>
+      </p:ext>
+    </p:extLst>
+  </p:cSld>
+  <p:clrMapOvr>
+    <a:masterClrMapping/>
+  </p:clrMapOvr>
+</p:sld>
+</file>
+
+<file path=ppt/slides/slide20.xml><?xml version="1.0" encoding="utf-8"?>
+<p:sld xmlns:a="http://schemas.openxmlformats.org/drawingml/2006/main" xmlns:r="http://schemas.openxmlformats.org/officeDocument/2006/relationships" xmlns:p="http://schemas.openxmlformats.org/presentationml/2006/main">
+  <p:cSld>
+    <p:spTree>
+      <p:nvGrpSpPr>
+        <p:cNvPr id="1" name="">
+          <a:extLst>
+            <a:ext uri="{FF2B5EF4-FFF2-40B4-BE49-F238E27FC236}">
+              <a16:creationId xmlns:a16="http://schemas.microsoft.com/office/drawing/2014/main" id="{30AC922E-6776-A07E-F7C9-FA5EB1D6FC10}"/>
+            </a:ext>
+          </a:extLst>
+        </p:cNvPr>
+        <p:cNvGrpSpPr/>
+        <p:nvPr/>
+      </p:nvGrpSpPr>
+      <p:grpSpPr>
+        <a:xfrm>
+          <a:off x="0" y="0"/>
+          <a:ext cx="0" cy="0"/>
+          <a:chOff x="0" y="0"/>
+          <a:chExt cx="0" cy="0"/>
+        </a:xfrm>
+      </p:grpSpPr>
+      <p:sp>
+        <p:nvSpPr>
+          <p:cNvPr id="2" name="Title 1">
+            <a:extLst>
+              <a:ext uri="{FF2B5EF4-FFF2-40B4-BE49-F238E27FC236}">
+                <a16:creationId xmlns:a16="http://schemas.microsoft.com/office/drawing/2014/main" id="{4AA532F0-E963-B2ED-1337-79107003E6BF}"/>
+              </a:ext>
+            </a:extLst>
+          </p:cNvPr>
+          <p:cNvSpPr>
+            <a:spLocks noGrp="1"/>
+          </p:cNvSpPr>
+          <p:nvPr>
+            <p:ph type="title"/>
+          </p:nvPr>
+        </p:nvSpPr>
+        <p:spPr/>
+        <p:txBody>
+          <a:bodyPr>
+            <a:normAutofit/>
+          </a:bodyPr>
+          <a:lstStyle/>
+          <a:p>
+            <a:pPr rtl="1"/>
+            <a:r>
+              <a:rPr lang="fa-IR" b="1" dirty="0">
+                <a:effectLst>
+                  <a:outerShdw blurRad="38100" dist="38100" dir="2700000" algn="tl">
+                    <a:srgbClr val="000000">
+                      <a:alpha val="43137"/>
+                    </a:srgbClr>
+                  </a:outerShdw>
+                </a:effectLst>
+                <a:latin typeface="IRANSans" panose="02040503050201020203" pitchFamily="18" charset="-78"/>
+                <a:cs typeface="IRANSans" panose="02040503050201020203" pitchFamily="18" charset="-78"/>
+              </a:rPr>
+              <a:t>تمرین </a:t>
+            </a:r>
+            <a:r>
+              <a:rPr lang="en-US" b="1" dirty="0">
+                <a:effectLst>
+                  <a:outerShdw blurRad="38100" dist="38100" dir="2700000" algn="tl">
+                    <a:srgbClr val="000000">
+                      <a:alpha val="43137"/>
+                    </a:srgbClr>
+                  </a:outerShdw>
+                </a:effectLst>
+                <a:latin typeface="IRANSans" panose="02040503050201020203" pitchFamily="18" charset="-78"/>
+                <a:cs typeface="IRANSans" panose="02040503050201020203" pitchFamily="18" charset="-78"/>
+              </a:rPr>
+              <a:t>5</a:t>
+            </a:r>
+          </a:p>
+        </p:txBody>
+      </p:sp>
+      <p:sp>
+        <p:nvSpPr>
+          <p:cNvPr id="3" name="Content Placeholder 2">
+            <a:extLst>
+              <a:ext uri="{FF2B5EF4-FFF2-40B4-BE49-F238E27FC236}">
+                <a16:creationId xmlns:a16="http://schemas.microsoft.com/office/drawing/2014/main" id="{E3498685-55A1-CB64-06C6-0BCC309C71E5}"/>
+              </a:ext>
+            </a:extLst>
+          </p:cNvPr>
+          <p:cNvSpPr>
+            <a:spLocks noGrp="1"/>
+          </p:cNvSpPr>
+          <p:nvPr>
+            <p:ph idx="1"/>
+          </p:nvPr>
+        </p:nvSpPr>
+        <p:spPr/>
+        <p:txBody>
+          <a:bodyPr>
+            <a:normAutofit/>
+          </a:bodyPr>
+          <a:lstStyle/>
+          <a:p>
+            <a:pPr algn="r" rtl="1">
+              <a:lnSpc>
+                <a:spcPct val="150000"/>
+              </a:lnSpc>
+            </a:pPr>
+            <a:r>
+              <a:rPr lang="fa-IR" sz="4400" dirty="0">
+                <a:latin typeface="IRANSans" panose="02040503050201020203" pitchFamily="18" charset="-78"/>
+                <a:cs typeface="IRANSans" panose="02040503050201020203" pitchFamily="18" charset="-78"/>
+              </a:rPr>
+              <a:t>برنامه ای بنویسید که نام سه نفر را بگیرد و بین این سه نفر یکی را به صورت رندوم انتخاب کند و چاپ کند</a:t>
+            </a:r>
+          </a:p>
+        </p:txBody>
+      </p:sp>
+    </p:spTree>
+    <p:extLst>
+      <p:ext uri="{BB962C8B-B14F-4D97-AF65-F5344CB8AC3E}">
+        <p14:creationId xmlns:p14="http://schemas.microsoft.com/office/powerpoint/2010/main" val="3644286560"/>
+      </p:ext>
+    </p:extLst>
+  </p:cSld>
+  <p:clrMapOvr>
+    <a:masterClrMapping/>
+  </p:clrMapOvr>
+  <p:timing>
+    <p:tnLst>
+      <p:par>
+        <p:cTn id="1" dur="indefinite" restart="never" nodeType="tmRoot">
+          <p:childTnLst>
+            <p:seq concurrent="1" nextAc="seek">
+              <p:cTn id="2" dur="indefinite" nodeType="mainSeq">
+                <p:childTnLst>
+                  <p:par>
+                    <p:cTn id="3" fill="hold">
+                      <p:stCondLst>
+                        <p:cond delay="indefinite"/>
+                      </p:stCondLst>
+                      <p:childTnLst>
+                        <p:par>
+                          <p:cTn id="4" fill="hold">
+                            <p:stCondLst>
+                              <p:cond delay="0"/>
+                            </p:stCondLst>
+                            <p:childTnLst>
+                              <p:par>
+                                <p:cTn id="5" presetID="10" presetClass="entr" presetSubtype="0" fill="hold" nodeType="clickEffect">
+                                  <p:stCondLst>
+                                    <p:cond delay="0"/>
+                                  </p:stCondLst>
+                                  <p:childTnLst>
+                                    <p:set>
+                                      <p:cBhvr>
+                                        <p:cTn id="6" dur="1" fill="hold">
+                                          <p:stCondLst>
+                                            <p:cond delay="0"/>
+                                          </p:stCondLst>
+                                        </p:cTn>
+                                        <p:tgtEl>
+                                          <p:spTgt spid="3">
+                                            <p:txEl>
+                                              <p:pRg st="0" end="0"/>
+                                            </p:txEl>
+                                          </p:spTgt>
+                                        </p:tgtEl>
+                                        <p:attrNameLst>
+                                          <p:attrName>style.visibility</p:attrName>
+                                        </p:attrNameLst>
+                                      </p:cBhvr>
+                                      <p:to>
+                                        <p:strVal val="visible"/>
+                                      </p:to>
+                                    </p:set>
+                                    <p:animEffect transition="in" filter="fade">
+                                      <p:cBhvr>
+                                        <p:cTn id="7" dur="500"/>
+                                        <p:tgtEl>
+                                          <p:spTgt spid="3">
+                                            <p:txEl>
+                                              <p:pRg st="0" end="0"/>
+                                            </p:txEl>
+                                          </p:spTgt>
+                                        </p:tgtEl>
+                                      </p:cBhvr>
+                                    </p:animEffect>
+                                  </p:childTnLst>
+                                </p:cTn>
+                              </p:par>
+                            </p:childTnLst>
+                          </p:cTn>
+                        </p:par>
+                      </p:childTnLst>
+                    </p:cTn>
+                  </p:par>
+                </p:childTnLst>
+              </p:cTn>
+              <p:prevCondLst>
+                <p:cond evt="onPrev" delay="0">
+                  <p:tgtEl>
+                    <p:sldTgt/>
+                  </p:tgtEl>
+                </p:cond>
+              </p:prevCondLst>
+              <p:nextCondLst>
+                <p:cond evt="onNext" delay="0">
+                  <p:tgtEl>
+                    <p:sldTgt/>
+                  </p:tgtEl>
+                </p:cond>
+              </p:nextCondLst>
+            </p:seq>
+          </p:childTnLst>
+        </p:cTn>
+      </p:par>
+    </p:tnLst>
+  </p:timing>
+</p:sld>
+</file>
+
+<file path=ppt/slides/slide21.xml><?xml version="1.0" encoding="utf-8"?>
+<p:sld xmlns:a="http://schemas.openxmlformats.org/drawingml/2006/main" xmlns:r="http://schemas.openxmlformats.org/officeDocument/2006/relationships" xmlns:p="http://schemas.openxmlformats.org/presentationml/2006/main">
+  <p:cSld>
+    <p:spTree>
+      <p:nvGrpSpPr>
+        <p:cNvPr id="1" name="">
+          <a:extLst>
+            <a:ext uri="{FF2B5EF4-FFF2-40B4-BE49-F238E27FC236}">
+              <a16:creationId xmlns:a16="http://schemas.microsoft.com/office/drawing/2014/main" id="{ABFFAF5D-C38F-AC7F-348F-2D29331472D5}"/>
+            </a:ext>
+          </a:extLst>
+        </p:cNvPr>
+        <p:cNvGrpSpPr/>
+        <p:nvPr/>
+      </p:nvGrpSpPr>
+      <p:grpSpPr>
+        <a:xfrm>
+          <a:off x="0" y="0"/>
+          <a:ext cx="0" cy="0"/>
+          <a:chOff x="0" y="0"/>
+          <a:chExt cx="0" cy="0"/>
+        </a:xfrm>
+      </p:grpSpPr>
+      <p:sp>
+        <p:nvSpPr>
+          <p:cNvPr id="2" name="Title 1">
+            <a:extLst>
+              <a:ext uri="{FF2B5EF4-FFF2-40B4-BE49-F238E27FC236}">
+                <a16:creationId xmlns:a16="http://schemas.microsoft.com/office/drawing/2014/main" id="{28199336-2112-9982-9D57-07EE783F2A9E}"/>
+              </a:ext>
+            </a:extLst>
+          </p:cNvPr>
+          <p:cNvSpPr>
+            <a:spLocks noGrp="1"/>
+          </p:cNvSpPr>
+          <p:nvPr>
+            <p:ph type="ctrTitle"/>
+          </p:nvPr>
+        </p:nvSpPr>
+        <p:spPr>
+          <a:xfrm>
+            <a:off x="1370693" y="2240764"/>
+            <a:ext cx="9440034" cy="2407442"/>
+          </a:xfrm>
+        </p:spPr>
+        <p:txBody>
+          <a:bodyPr>
+            <a:normAutofit/>
+          </a:bodyPr>
+          <a:lstStyle/>
+          <a:p>
+            <a:pPr rtl="1"/>
+            <a:r>
+              <a:rPr lang="fa-IR" sz="8000" b="1" dirty="0">
+                <a:latin typeface="IRANSans" panose="02040503050201020203" pitchFamily="18" charset="-78"/>
+                <a:cs typeface="IRANSans" panose="02040503050201020203" pitchFamily="18" charset="-78"/>
+              </a:rPr>
+              <a:t>موفق باشید</a:t>
+            </a:r>
+            <a:endParaRPr lang="en-US" sz="8000" b="1" dirty="0">
+              <a:solidFill>
+                <a:srgbClr val="92D050"/>
+              </a:solidFill>
+              <a:latin typeface="IRANSans" panose="02040503050201020203" pitchFamily="18" charset="-78"/>
+              <a:cs typeface="IRANSans" panose="02040503050201020203" pitchFamily="18" charset="-78"/>
+            </a:endParaRPr>
+          </a:p>
+        </p:txBody>
+      </p:sp>
+      <p:sp>
+        <p:nvSpPr>
+          <p:cNvPr id="4" name="TextBox 3">
+            <a:extLst>
+              <a:ext uri="{FF2B5EF4-FFF2-40B4-BE49-F238E27FC236}">
+                <a16:creationId xmlns:a16="http://schemas.microsoft.com/office/drawing/2014/main" id="{79CC19DC-A4D1-56F7-08F4-160D5A70FB45}"/>
+              </a:ext>
+            </a:extLst>
+          </p:cNvPr>
+          <p:cNvSpPr txBox="1"/>
+          <p:nvPr/>
+        </p:nvSpPr>
+        <p:spPr>
+          <a:xfrm>
+            <a:off x="1381272" y="5231255"/>
+            <a:ext cx="9429456" cy="1061829"/>
+          </a:xfrm>
+          <a:prstGeom prst="rect">
+            <a:avLst/>
+          </a:prstGeom>
+          <a:noFill/>
+        </p:spPr>
+        <p:txBody>
+          <a:bodyPr wrap="square" rtlCol="0">
+            <a:spAutoFit/>
+          </a:bodyPr>
+          <a:lstStyle/>
+          <a:p>
+            <a:pPr algn="r" rtl="1">
+              <a:lnSpc>
+                <a:spcPct val="150000"/>
+              </a:lnSpc>
+            </a:pPr>
+            <a:r>
+              <a:rPr lang="fa-IR" sz="2000" dirty="0">
+                <a:latin typeface="IRANSans" panose="02040503050201020203" pitchFamily="18" charset="-78"/>
+                <a:cs typeface="IRANSans" panose="02040503050201020203" pitchFamily="18" charset="-78"/>
+              </a:rPr>
+              <a:t>کانال تلگرام: </a:t>
+            </a:r>
+            <a:r>
+              <a:rPr lang="en-US" sz="2000" dirty="0">
+                <a:solidFill>
+                  <a:srgbClr val="00B0F0"/>
+                </a:solidFill>
+                <a:latin typeface="IRANSans" panose="02040503050201020203" pitchFamily="18" charset="-78"/>
+                <a:cs typeface="IRANSans" panose="02040503050201020203" pitchFamily="18" charset="-78"/>
+              </a:rPr>
+              <a:t>@att_python</a:t>
+            </a:r>
+          </a:p>
+          <a:p>
+            <a:pPr algn="r" rtl="1">
+              <a:lnSpc>
+                <a:spcPct val="150000"/>
+              </a:lnSpc>
+            </a:pPr>
+            <a:r>
+              <a:rPr lang="fa-IR" sz="2400" dirty="0">
+                <a:latin typeface="IRANSans" panose="02040503050201020203" pitchFamily="18" charset="-78"/>
+                <a:cs typeface="IRANSans" panose="02040503050201020203" pitchFamily="18" charset="-78"/>
+              </a:rPr>
+              <a:t>شماره تماس: 09336448037</a:t>
+            </a:r>
+          </a:p>
+        </p:txBody>
+      </p:sp>
+      <p:pic>
+        <p:nvPicPr>
+          <p:cNvPr id="6" name="Picture 5">
+            <a:extLst>
+              <a:ext uri="{FF2B5EF4-FFF2-40B4-BE49-F238E27FC236}">
+                <a16:creationId xmlns:a16="http://schemas.microsoft.com/office/drawing/2014/main" id="{A04B4FB1-79B5-7FE0-813D-3B30A92B2468}"/>
+              </a:ext>
+            </a:extLst>
+          </p:cNvPr>
+          <p:cNvPicPr>
+            <a:picLocks noChangeAspect="1"/>
+          </p:cNvPicPr>
+          <p:nvPr/>
+        </p:nvPicPr>
+        <p:blipFill>
+          <a:blip r:embed="rId2">
+            <a:extLst>
+              <a:ext uri="{28A0092B-C50C-407E-A947-70E740481C1C}">
+                <a14:useLocalDpi xmlns:a14="http://schemas.microsoft.com/office/drawing/2010/main" val="0"/>
+              </a:ext>
+            </a:extLst>
+          </a:blip>
+          <a:stretch>
+            <a:fillRect/>
+          </a:stretch>
+        </p:blipFill>
+        <p:spPr>
+          <a:xfrm>
+            <a:off x="4837531" y="452272"/>
+            <a:ext cx="2516938" cy="2516938"/>
+          </a:xfrm>
+          <a:prstGeom prst="rect">
+            <a:avLst/>
+          </a:prstGeom>
+        </p:spPr>
+      </p:pic>
+      <p:sp>
+        <p:nvSpPr>
+          <p:cNvPr id="7" name="Subtitle 6">
+            <a:extLst>
+              <a:ext uri="{FF2B5EF4-FFF2-40B4-BE49-F238E27FC236}">
+                <a16:creationId xmlns:a16="http://schemas.microsoft.com/office/drawing/2014/main" id="{D89AA7FD-2B55-55E4-A4B1-C1B937315549}"/>
+              </a:ext>
+            </a:extLst>
+          </p:cNvPr>
+          <p:cNvSpPr>
+            <a:spLocks noGrp="1"/>
+          </p:cNvSpPr>
+          <p:nvPr>
+            <p:ph type="subTitle" idx="1"/>
+          </p:nvPr>
+        </p:nvSpPr>
+        <p:spPr/>
+        <p:txBody>
+          <a:bodyPr/>
+          <a:lstStyle/>
+          <a:p>
+            <a:r>
+              <a:rPr lang="fa-IR" dirty="0"/>
+              <a:t> </a:t>
+            </a:r>
+            <a:endParaRPr lang="en-US" dirty="0"/>
+          </a:p>
+        </p:txBody>
+      </p:sp>
+    </p:spTree>
+    <p:extLst>
+      <p:ext uri="{BB962C8B-B14F-4D97-AF65-F5344CB8AC3E}">
+        <p14:creationId xmlns:p14="http://schemas.microsoft.com/office/powerpoint/2010/main" val="4154749472"/>
       </p:ext>
     </p:extLst>
   </p:cSld>
